--- a/Presentatie1.pptx
+++ b/Presentatie1.pptx
@@ -5,7 +5,7 @@
     <p:sldMasterId id="2147483648" r:id="rId1"/>
   </p:sldMasterIdLst>
   <p:notesMasterIdLst>
-    <p:notesMasterId r:id="rId16"/>
+    <p:notesMasterId r:id="rId17"/>
   </p:notesMasterIdLst>
   <p:sldIdLst>
     <p:sldId id="256" r:id="rId2"/>
@@ -19,9 +19,10 @@
     <p:sldId id="267" r:id="rId10"/>
     <p:sldId id="268" r:id="rId11"/>
     <p:sldId id="269" r:id="rId12"/>
-    <p:sldId id="264" r:id="rId13"/>
-    <p:sldId id="265" r:id="rId14"/>
-    <p:sldId id="266" r:id="rId15"/>
+    <p:sldId id="270" r:id="rId13"/>
+    <p:sldId id="264" r:id="rId14"/>
+    <p:sldId id="265" r:id="rId15"/>
+    <p:sldId id="266" r:id="rId16"/>
   </p:sldIdLst>
   <p:sldSz cx="12192000" cy="6858000"/>
   <p:notesSz cx="6858000" cy="9144000"/>
@@ -537,7 +538,7 @@
           <a:p>
             <a:fld id="{F1532ED0-5AAD-3941-964B-0FD5D489EE9B}" type="slidenum">
               <a:rPr lang="nl-NL" smtClean="0"/>
-              <a:t>14</a:t>
+              <a:t>15</a:t>
             </a:fld>
             <a:endParaRPr lang="nl-NL"/>
           </a:p>
@@ -5220,11 +5221,7 @@
           <a:p>
             <a:r>
               <a:rPr lang="nl-NL" dirty="0"/>
-              <a:t>Start, move, end </a:t>
-            </a:r>
-            <a:r>
-              <a:rPr lang="nl-NL"/>
-              <a:t>-&gt; delete</a:t>
+              <a:t>Start, move, end -&gt; delete</a:t>
             </a:r>
           </a:p>
         </p:txBody>
@@ -5264,7 +5261,7 @@
           <p:cNvPr id="2" name="Titel 1">
             <a:extLst>
               <a:ext uri="{FF2B5EF4-FFF2-40B4-BE49-F238E27FC236}">
-                <a16:creationId xmlns:a16="http://schemas.microsoft.com/office/drawing/2014/main" id="{CFE3AA31-F56F-F280-A8E7-19B16F7F5F60}"/>
+                <a16:creationId xmlns:a16="http://schemas.microsoft.com/office/drawing/2014/main" id="{FFB58FE4-90E8-1249-BCF7-A089D3D79CA6}"/>
               </a:ext>
             </a:extLst>
           </p:cNvPr>
@@ -5283,7 +5280,7 @@
             <a:pPr algn="ctr"/>
             <a:r>
               <a:rPr lang="nl-NL" dirty="0"/>
-              <a:t>Security</a:t>
+              <a:t>Login</a:t>
             </a:r>
           </a:p>
         </p:txBody>
@@ -5293,7 +5290,7 @@
           <p:cNvPr id="3" name="Tijdelijke aanduiding voor inhoud 2">
             <a:extLst>
               <a:ext uri="{FF2B5EF4-FFF2-40B4-BE49-F238E27FC236}">
-                <a16:creationId xmlns:a16="http://schemas.microsoft.com/office/drawing/2014/main" id="{03E70E61-49F2-2C57-3033-2AC05A1C6BA3}"/>
+                <a16:creationId xmlns:a16="http://schemas.microsoft.com/office/drawing/2014/main" id="{7994DFAA-983A-06C2-23C2-0EFB4BDDF281}"/>
               </a:ext>
             </a:extLst>
           </p:cNvPr>
@@ -5309,14 +5306,61 @@
           <a:bodyPr/>
           <a:lstStyle/>
           <a:p>
-            <a:endParaRPr lang="nl-NL"/>
+            <a:r>
+              <a:rPr lang="nl-NL" dirty="0"/>
+              <a:t>import </a:t>
+            </a:r>
+            <a:r>
+              <a:rPr lang="nl-NL" dirty="0" err="1"/>
+              <a:t>javax.annotation.security.RolesAllowed</a:t>
+            </a:r>
+            <a:r>
+              <a:rPr lang="nl-NL" dirty="0"/>
+              <a:t>;</a:t>
+            </a:r>
+          </a:p>
+          <a:p>
+            <a:r>
+              <a:rPr lang="nl-NL" dirty="0" err="1"/>
+              <a:t>SnakeResource.java</a:t>
+            </a:r>
+            <a:endParaRPr lang="nl-NL" dirty="0"/>
+          </a:p>
+          <a:p>
+            <a:r>
+              <a:rPr lang="nl-NL" dirty="0"/>
+              <a:t>@</a:t>
+            </a:r>
+            <a:r>
+              <a:rPr lang="nl-NL" dirty="0" err="1"/>
+              <a:t>RolesAllowed</a:t>
+            </a:r>
+            <a:r>
+              <a:rPr lang="nl-NL" dirty="0"/>
+              <a:t>({"user", "</a:t>
+            </a:r>
+            <a:r>
+              <a:rPr lang="nl-NL" dirty="0" err="1"/>
+              <a:t>admin</a:t>
+            </a:r>
+            <a:r>
+              <a:rPr lang="nl-NL" dirty="0"/>
+              <a:t>"})</a:t>
+            </a:r>
+          </a:p>
+          <a:p>
+            <a:r>
+              <a:rPr lang="nl-NL" dirty="0" err="1"/>
+              <a:t>GamesResource.java</a:t>
+            </a:r>
+            <a:endParaRPr lang="nl-NL" dirty="0"/>
           </a:p>
         </p:txBody>
       </p:sp>
     </p:spTree>
     <p:extLst>
       <p:ext uri="{BB962C8B-B14F-4D97-AF65-F5344CB8AC3E}">
-        <p14:creationId xmlns:p14="http://schemas.microsoft.com/office/powerpoint/2010/main" val="1241084281"/>
+        <p14:creationId xmlns:p14="http://schemas.microsoft.com/office/powerpoint/2010/main" val="3796976134"/>
       </p:ext>
     </p:extLst>
   </p:cSld>
@@ -5348,6 +5392,265 @@
           <p:cNvPr id="2" name="Titel 1">
             <a:extLst>
               <a:ext uri="{FF2B5EF4-FFF2-40B4-BE49-F238E27FC236}">
+                <a16:creationId xmlns:a16="http://schemas.microsoft.com/office/drawing/2014/main" id="{CFE3AA31-F56F-F280-A8E7-19B16F7F5F60}"/>
+              </a:ext>
+            </a:extLst>
+          </p:cNvPr>
+          <p:cNvSpPr>
+            <a:spLocks noGrp="1"/>
+          </p:cNvSpPr>
+          <p:nvPr>
+            <p:ph type="title"/>
+          </p:nvPr>
+        </p:nvSpPr>
+        <p:spPr/>
+        <p:txBody>
+          <a:bodyPr/>
+          <a:lstStyle/>
+          <a:p>
+            <a:pPr algn="ctr"/>
+            <a:r>
+              <a:rPr lang="nl-NL" dirty="0"/>
+              <a:t>Security</a:t>
+            </a:r>
+          </a:p>
+        </p:txBody>
+      </p:sp>
+      <p:sp>
+        <p:nvSpPr>
+          <p:cNvPr id="3" name="Tijdelijke aanduiding voor inhoud 2">
+            <a:extLst>
+              <a:ext uri="{FF2B5EF4-FFF2-40B4-BE49-F238E27FC236}">
+                <a16:creationId xmlns:a16="http://schemas.microsoft.com/office/drawing/2014/main" id="{03E70E61-49F2-2C57-3033-2AC05A1C6BA3}"/>
+              </a:ext>
+            </a:extLst>
+          </p:cNvPr>
+          <p:cNvSpPr>
+            <a:spLocks noGrp="1"/>
+          </p:cNvSpPr>
+          <p:nvPr>
+            <p:ph idx="1"/>
+          </p:nvPr>
+        </p:nvSpPr>
+        <p:spPr/>
+        <p:txBody>
+          <a:bodyPr/>
+          <a:lstStyle/>
+          <a:p>
+            <a:r>
+              <a:rPr lang="nl-NL" b="1" dirty="0"/>
+              <a:t>Login </a:t>
+            </a:r>
+            <a:r>
+              <a:rPr lang="nl-NL" b="1" dirty="0" err="1"/>
+              <a:t>endpoint</a:t>
+            </a:r>
+            <a:r>
+              <a:rPr lang="nl-NL" b="1" dirty="0"/>
+              <a:t>: </a:t>
+            </a:r>
+            <a:r>
+              <a:rPr lang="nl-NL" dirty="0"/>
+              <a:t>POST /restservices/</a:t>
+            </a:r>
+            <a:r>
+              <a:rPr lang="nl-NL" dirty="0" err="1"/>
+              <a:t>authentication</a:t>
+            </a:r>
+            <a:endParaRPr lang="nl-NL" dirty="0"/>
+          </a:p>
+          <a:p>
+            <a:r>
+              <a:rPr lang="nl-NL" b="1" dirty="0"/>
+              <a:t>JWT bevat </a:t>
+            </a:r>
+            <a:r>
+              <a:rPr lang="nl-NL" b="1" dirty="0" err="1"/>
+              <a:t>role</a:t>
+            </a:r>
+            <a:r>
+              <a:rPr lang="nl-NL" b="1" dirty="0"/>
+              <a:t>: </a:t>
+            </a:r>
+            <a:r>
+              <a:rPr lang="nl-NL" dirty="0"/>
+              <a:t>In de token stop ik: .claim("</a:t>
+            </a:r>
+            <a:r>
+              <a:rPr lang="nl-NL" dirty="0" err="1"/>
+              <a:t>role</a:t>
+            </a:r>
+            <a:r>
+              <a:rPr lang="nl-NL" dirty="0"/>
+              <a:t>", </a:t>
+            </a:r>
+            <a:r>
+              <a:rPr lang="nl-NL" dirty="0" err="1"/>
+              <a:t>role</a:t>
+            </a:r>
+            <a:r>
+              <a:rPr lang="nl-NL" dirty="0"/>
+              <a:t>)</a:t>
+            </a:r>
+          </a:p>
+          <a:p>
+            <a:r>
+              <a:rPr lang="nl-NL" b="1" dirty="0"/>
+              <a:t>Beveiligde </a:t>
+            </a:r>
+            <a:r>
+              <a:rPr lang="nl-NL" b="1" dirty="0" err="1"/>
+              <a:t>endpoints</a:t>
+            </a:r>
+            <a:r>
+              <a:rPr lang="nl-NL" b="1" dirty="0"/>
+              <a:t> met </a:t>
+            </a:r>
+            <a:r>
+              <a:rPr lang="nl-NL" b="1" dirty="0" err="1"/>
+              <a:t>roles</a:t>
+            </a:r>
+            <a:br>
+              <a:rPr lang="nl-NL" dirty="0"/>
+            </a:br>
+            <a:r>
+              <a:rPr lang="nl-NL" dirty="0"/>
+              <a:t>Bijvoorbeeld: PATCH /</a:t>
+            </a:r>
+            <a:r>
+              <a:rPr lang="nl-NL" dirty="0" err="1"/>
+              <a:t>snake</a:t>
+            </a:r>
+            <a:r>
+              <a:rPr lang="nl-NL" dirty="0"/>
+              <a:t> mag alleen met: </a:t>
+            </a:r>
+            <a:r>
+              <a:rPr lang="nl-NL" sz="1200" dirty="0"/>
+              <a:t>@</a:t>
+            </a:r>
+            <a:r>
+              <a:rPr lang="nl-NL" sz="1200" dirty="0" err="1"/>
+              <a:t>RolesAllowed</a:t>
+            </a:r>
+            <a:r>
+              <a:rPr lang="nl-NL" sz="1200" dirty="0"/>
+              <a:t>({"user", "</a:t>
+            </a:r>
+            <a:r>
+              <a:rPr lang="nl-NL" sz="1200" dirty="0" err="1"/>
+              <a:t>admin</a:t>
+            </a:r>
+            <a:r>
+              <a:rPr lang="nl-NL" sz="1200" dirty="0"/>
+              <a:t>"})</a:t>
+            </a:r>
+          </a:p>
+          <a:p>
+            <a:r>
+              <a:rPr lang="nl-NL" b="1" dirty="0"/>
+              <a:t>Games beveiligen</a:t>
+            </a:r>
+            <a:br>
+              <a:rPr lang="nl-NL" sz="1200" dirty="0"/>
+            </a:br>
+            <a:r>
+              <a:rPr lang="nl-NL" dirty="0"/>
+              <a:t>GET /games/{</a:t>
+            </a:r>
+            <a:r>
+              <a:rPr lang="nl-NL" dirty="0" err="1"/>
+              <a:t>gameId</a:t>
+            </a:r>
+            <a:r>
+              <a:rPr lang="nl-NL" dirty="0"/>
+              <a:t>}</a:t>
+            </a:r>
+            <a:r>
+              <a:rPr lang="nl-NL" sz="1200" dirty="0"/>
+              <a:t> en </a:t>
+            </a:r>
+            <a:r>
+              <a:rPr lang="nl-NL" dirty="0"/>
+              <a:t>DELETE /games/{</a:t>
+            </a:r>
+            <a:r>
+              <a:rPr lang="nl-NL" dirty="0" err="1"/>
+              <a:t>gameId</a:t>
+            </a:r>
+            <a:r>
+              <a:rPr lang="nl-NL" dirty="0"/>
+              <a:t>}</a:t>
+            </a:r>
+            <a:r>
+              <a:rPr lang="nl-NL" sz="1200" dirty="0"/>
+              <a:t> zijn ook beveiligd met </a:t>
+            </a:r>
+            <a:r>
+              <a:rPr lang="nl-NL" dirty="0"/>
+              <a:t>@</a:t>
+            </a:r>
+            <a:r>
+              <a:rPr lang="nl-NL" dirty="0" err="1"/>
+              <a:t>RolesAllowed</a:t>
+            </a:r>
+            <a:r>
+              <a:rPr lang="nl-NL" dirty="0"/>
+              <a:t>({"user", "</a:t>
+            </a:r>
+            <a:r>
+              <a:rPr lang="nl-NL" dirty="0" err="1"/>
+              <a:t>admin</a:t>
+            </a:r>
+            <a:r>
+              <a:rPr lang="nl-NL" dirty="0"/>
+              <a:t>"})</a:t>
+            </a:r>
+            <a:r>
+              <a:rPr lang="nl-NL" sz="1200" dirty="0"/>
+              <a:t>. </a:t>
+            </a:r>
+          </a:p>
+          <a:p>
+            <a:endParaRPr lang="nl-NL" dirty="0"/>
+          </a:p>
+        </p:txBody>
+      </p:sp>
+    </p:spTree>
+    <p:extLst>
+      <p:ext uri="{BB962C8B-B14F-4D97-AF65-F5344CB8AC3E}">
+        <p14:creationId xmlns:p14="http://schemas.microsoft.com/office/powerpoint/2010/main" val="1241084281"/>
+      </p:ext>
+    </p:extLst>
+  </p:cSld>
+  <p:clrMapOvr>
+    <a:masterClrMapping/>
+  </p:clrMapOvr>
+</p:sld>
+</file>
+
+<file path=ppt/slides/slide14.xml><?xml version="1.0" encoding="utf-8"?>
+<p:sld xmlns:a="http://schemas.openxmlformats.org/drawingml/2006/main" xmlns:r="http://schemas.openxmlformats.org/officeDocument/2006/relationships" xmlns:p="http://schemas.openxmlformats.org/presentationml/2006/main">
+  <p:cSld>
+    <p:spTree>
+      <p:nvGrpSpPr>
+        <p:cNvPr id="1" name=""/>
+        <p:cNvGrpSpPr/>
+        <p:nvPr/>
+      </p:nvGrpSpPr>
+      <p:grpSpPr>
+        <a:xfrm>
+          <a:off x="0" y="0"/>
+          <a:ext cx="0" cy="0"/>
+          <a:chOff x="0" y="0"/>
+          <a:chExt cx="0" cy="0"/>
+        </a:xfrm>
+      </p:grpSpPr>
+      <p:sp>
+        <p:nvSpPr>
+          <p:cNvPr id="2" name="Titel 1">
+            <a:extLst>
+              <a:ext uri="{FF2B5EF4-FFF2-40B4-BE49-F238E27FC236}">
                 <a16:creationId xmlns:a16="http://schemas.microsoft.com/office/drawing/2014/main" id="{A327BE19-1DAD-429A-AE09-1E6DB5443CF5}"/>
               </a:ext>
             </a:extLst>
@@ -5393,7 +5696,73 @@
           <a:bodyPr/>
           <a:lstStyle/>
           <a:p>
-            <a:endParaRPr lang="nl-NL"/>
+            <a:r>
+              <a:rPr lang="nl-NL" dirty="0"/>
+              <a:t>Ik test of </a:t>
+            </a:r>
+            <a:r>
+              <a:rPr lang="nl-NL" dirty="0" err="1"/>
+              <a:t>Game.chooseMove</a:t>
+            </a:r>
+            <a:r>
+              <a:rPr lang="nl-NL" dirty="0"/>
+              <a:t>(</a:t>
+            </a:r>
+            <a:r>
+              <a:rPr lang="nl-NL" dirty="0" err="1"/>
+              <a:t>foo</a:t>
+            </a:r>
+            <a:r>
+              <a:rPr lang="nl-NL" dirty="0"/>
+              <a:t>) slimme/veilige keuzes maakt.</a:t>
+            </a:r>
+            <a:br>
+              <a:rPr lang="nl-NL"/>
+            </a:br>
+            <a:r>
+              <a:rPr lang="nl-NL"/>
+              <a:t>Ik </a:t>
+            </a:r>
+            <a:r>
+              <a:rPr lang="nl-NL" dirty="0"/>
+              <a:t>test hier vooral:</a:t>
+            </a:r>
+            <a:br>
+              <a:rPr lang="nl-NL" dirty="0"/>
+            </a:br>
+            <a:r>
+              <a:rPr lang="nl-NL" dirty="0"/>
+              <a:t>// 1. richting food gaan als dat veilig is</a:t>
+            </a:r>
+            <a:br>
+              <a:rPr lang="nl-NL" dirty="0"/>
+            </a:br>
+            <a:r>
+              <a:rPr lang="nl-NL" dirty="0"/>
+              <a:t>// 2. niet door de muur gaan</a:t>
+            </a:r>
+            <a:br>
+              <a:rPr lang="nl-NL" dirty="0"/>
+            </a:br>
+            <a:r>
+              <a:rPr lang="nl-NL" dirty="0"/>
+              <a:t>// 3. niet tegen mijn eigen body gaan</a:t>
+            </a:r>
+            <a:br>
+              <a:rPr lang="nl-NL" dirty="0"/>
+            </a:br>
+            <a:r>
+              <a:rPr lang="nl-NL" dirty="0"/>
+              <a:t>// 4. niet tegen </a:t>
+            </a:r>
+            <a:r>
+              <a:rPr lang="nl-NL" dirty="0" err="1"/>
+              <a:t>enemy</a:t>
+            </a:r>
+            <a:r>
+              <a:rPr lang="nl-NL" dirty="0"/>
+              <a:t> body gaan</a:t>
+            </a:r>
           </a:p>
         </p:txBody>
       </p:sp>
@@ -5410,7 +5779,7 @@
 </p:sld>
 </file>
 
-<file path=ppt/slides/slide14.xml><?xml version="1.0" encoding="utf-8"?>
+<file path=ppt/slides/slide15.xml><?xml version="1.0" encoding="utf-8"?>
 <p:sld xmlns:a="http://schemas.openxmlformats.org/drawingml/2006/main" xmlns:r="http://schemas.openxmlformats.org/officeDocument/2006/relationships" xmlns:p="http://schemas.openxmlformats.org/presentationml/2006/main">
   <p:cSld>
     <p:spTree>
@@ -5990,7 +6359,23 @@
           <a:bodyPr/>
           <a:lstStyle/>
           <a:p>
-            <a:endParaRPr lang="nl-NL"/>
+            <a:r>
+              <a:rPr lang="nl-NL" dirty="0" err="1"/>
+              <a:t>Game.java</a:t>
+            </a:r>
+            <a:endParaRPr lang="nl-NL" dirty="0"/>
+          </a:p>
+          <a:p>
+            <a:r>
+              <a:rPr lang="nl-NL" dirty="0"/>
+              <a:t>Checks: raak ik mijzelf, een ander of de muur?</a:t>
+            </a:r>
+          </a:p>
+          <a:p>
+            <a:r>
+              <a:rPr lang="nl-NL" dirty="0"/>
+              <a:t>Zo niet, ga naar voedsel, anders, ga naar veilig plek</a:t>
+            </a:r>
           </a:p>
         </p:txBody>
       </p:sp>
@@ -6048,7 +6433,7 @@
             <a:pPr algn="ctr"/>
             <a:r>
               <a:rPr lang="nl-NL" dirty="0"/>
-              <a:t>Login</a:t>
+              <a:t>Login - Koppeling FEP &amp; BEP</a:t>
             </a:r>
           </a:p>
         </p:txBody>
@@ -6074,6 +6459,21 @@
           <a:bodyPr/>
           <a:lstStyle/>
           <a:p>
+            <a:r>
+              <a:rPr lang="nl-NL" dirty="0" err="1"/>
+              <a:t>ContextListener</a:t>
+            </a:r>
+            <a:endParaRPr lang="nl-NL" dirty="0"/>
+          </a:p>
+          <a:p>
+            <a:r>
+              <a:rPr lang="nl-NL" dirty="0"/>
+              <a:t>JS </a:t>
+            </a:r>
+            <a:r>
+              <a:rPr lang="nl-NL" dirty="0" err="1"/>
+              <a:t>fetch</a:t>
+            </a:r>
             <a:endParaRPr lang="nl-NL" dirty="0"/>
           </a:p>
         </p:txBody>
@@ -6153,15 +6553,1222 @@
             <p:ph idx="1"/>
           </p:nvPr>
         </p:nvSpPr>
-        <p:spPr/>
+        <p:spPr>
+          <a:xfrm>
+            <a:off x="2300263" y="1094686"/>
+            <a:ext cx="7796540" cy="3997828"/>
+          </a:xfrm>
+        </p:spPr>
         <p:txBody>
           <a:bodyPr/>
           <a:lstStyle/>
           <a:p>
-            <a:endParaRPr lang="nl-NL"/>
-          </a:p>
-        </p:txBody>
-      </p:sp>
+            <a:r>
+              <a:rPr lang="nl-NL" dirty="0"/>
+              <a:t>Mijn applicatie gebruikt een </a:t>
+            </a:r>
+            <a:r>
+              <a:rPr lang="nl-NL" dirty="0" err="1"/>
+              <a:t>RESTful</a:t>
+            </a:r>
+            <a:r>
+              <a:rPr lang="nl-NL" dirty="0"/>
+              <a:t> structuur waarbij resources via duidelijke URL’s bereikbaar zijn. De belangrijkste resources zijn </a:t>
+            </a:r>
+            <a:r>
+              <a:rPr lang="nl-NL" dirty="0" err="1"/>
+              <a:t>snake</a:t>
+            </a:r>
+            <a:r>
+              <a:rPr lang="nl-NL" dirty="0"/>
+              <a:t>, games en </a:t>
+            </a:r>
+            <a:r>
+              <a:rPr lang="nl-NL" dirty="0" err="1"/>
+              <a:t>authentication</a:t>
+            </a:r>
+            <a:r>
+              <a:rPr lang="nl-NL" dirty="0"/>
+              <a:t>.</a:t>
+            </a:r>
+          </a:p>
+          <a:p>
+            <a:endParaRPr lang="nl-NL" dirty="0"/>
+          </a:p>
+          <a:p>
+            <a:endParaRPr lang="nl-NL" dirty="0"/>
+          </a:p>
+          <a:p>
+            <a:endParaRPr lang="nl-NL" dirty="0"/>
+          </a:p>
+        </p:txBody>
+      </p:sp>
+      <p:graphicFrame>
+        <p:nvGraphicFramePr>
+          <p:cNvPr id="8" name="Tabel 7">
+            <a:extLst>
+              <a:ext uri="{FF2B5EF4-FFF2-40B4-BE49-F238E27FC236}">
+                <a16:creationId xmlns:a16="http://schemas.microsoft.com/office/drawing/2014/main" id="{F366C39D-AE16-2735-E6E1-93BB58EFF972}"/>
+              </a:ext>
+            </a:extLst>
+          </p:cNvPr>
+          <p:cNvGraphicFramePr>
+            <a:graphicFrameLocks noGrp="1"/>
+          </p:cNvGraphicFramePr>
+          <p:nvPr>
+            <p:extLst>
+              <p:ext uri="{D42A27DB-BD31-4B8C-83A1-F6EECF244321}">
+                <p14:modId xmlns:p14="http://schemas.microsoft.com/office/powerpoint/2010/main" val="3011292933"/>
+              </p:ext>
+            </p:extLst>
+          </p:nvPr>
+        </p:nvGraphicFramePr>
+        <p:xfrm>
+          <a:off x="2773363" y="2854770"/>
+          <a:ext cx="7796211" cy="2601219"/>
+        </p:xfrm>
+        <a:graphic>
+          <a:graphicData uri="http://schemas.openxmlformats.org/drawingml/2006/table">
+            <a:tbl>
+              <a:tblPr firstRow="1" firstCol="1" bandRow="1">
+                <a:tableStyleId>{5C22544A-7EE6-4342-B048-85BDC9FD1C3A}</a:tableStyleId>
+              </a:tblPr>
+              <a:tblGrid>
+                <a:gridCol w="2598737">
+                  <a:extLst>
+                    <a:ext uri="{9D8B030D-6E8A-4147-A177-3AD203B41FA5}">
+                      <a16:colId xmlns:a16="http://schemas.microsoft.com/office/drawing/2014/main" val="1654754045"/>
+                    </a:ext>
+                  </a:extLst>
+                </a:gridCol>
+                <a:gridCol w="2598737">
+                  <a:extLst>
+                    <a:ext uri="{9D8B030D-6E8A-4147-A177-3AD203B41FA5}">
+                      <a16:colId xmlns:a16="http://schemas.microsoft.com/office/drawing/2014/main" val="312797920"/>
+                    </a:ext>
+                  </a:extLst>
+                </a:gridCol>
+                <a:gridCol w="2598737">
+                  <a:extLst>
+                    <a:ext uri="{9D8B030D-6E8A-4147-A177-3AD203B41FA5}">
+                      <a16:colId xmlns:a16="http://schemas.microsoft.com/office/drawing/2014/main" val="746387376"/>
+                    </a:ext>
+                  </a:extLst>
+                </a:gridCol>
+              </a:tblGrid>
+              <a:tr h="0">
+                <a:tc>
+                  <a:txBody>
+                    <a:bodyPr/>
+                    <a:lstStyle/>
+                    <a:p>
+                      <a:pPr algn="ctr">
+                        <a:lnSpc>
+                          <a:spcPct val="115000"/>
+                        </a:lnSpc>
+                        <a:spcAft>
+                          <a:spcPts val="800"/>
+                        </a:spcAft>
+                        <a:buNone/>
+                      </a:pPr>
+                      <a:r>
+                        <a:rPr lang="nl-NL" sz="1200" kern="0">
+                          <a:effectLst/>
+                        </a:rPr>
+                        <a:t>HTTP methode</a:t>
+                      </a:r>
+                      <a:endParaRPr lang="nl-NL" sz="1200" kern="100">
+                        <a:effectLst/>
+                        <a:latin typeface="Aptos" panose="020B0004020202020204" pitchFamily="34" charset="0"/>
+                        <a:ea typeface="Aptos" panose="020B0004020202020204" pitchFamily="34" charset="0"/>
+                        <a:cs typeface="Times New Roman" panose="02020603050405020304" pitchFamily="18" charset="0"/>
+                      </a:endParaRPr>
+                    </a:p>
+                  </a:txBody>
+                  <a:tcPr marL="9525" marR="9525" marT="9525" marB="9525" anchor="ctr"/>
+                </a:tc>
+                <a:tc>
+                  <a:txBody>
+                    <a:bodyPr/>
+                    <a:lstStyle/>
+                    <a:p>
+                      <a:pPr algn="ctr">
+                        <a:lnSpc>
+                          <a:spcPct val="115000"/>
+                        </a:lnSpc>
+                        <a:spcAft>
+                          <a:spcPts val="800"/>
+                        </a:spcAft>
+                        <a:buNone/>
+                      </a:pPr>
+                      <a:r>
+                        <a:rPr lang="nl-NL" sz="1200" kern="0">
+                          <a:effectLst/>
+                        </a:rPr>
+                        <a:t>Endpoint</a:t>
+                      </a:r>
+                      <a:endParaRPr lang="nl-NL" sz="1200" kern="100">
+                        <a:effectLst/>
+                        <a:latin typeface="Aptos" panose="020B0004020202020204" pitchFamily="34" charset="0"/>
+                        <a:ea typeface="Aptos" panose="020B0004020202020204" pitchFamily="34" charset="0"/>
+                        <a:cs typeface="Times New Roman" panose="02020603050405020304" pitchFamily="18" charset="0"/>
+                      </a:endParaRPr>
+                    </a:p>
+                  </a:txBody>
+                  <a:tcPr marL="9525" marR="9525" marT="9525" marB="9525" anchor="ctr"/>
+                </a:tc>
+                <a:tc>
+                  <a:txBody>
+                    <a:bodyPr/>
+                    <a:lstStyle/>
+                    <a:p>
+                      <a:pPr algn="ctr">
+                        <a:lnSpc>
+                          <a:spcPct val="115000"/>
+                        </a:lnSpc>
+                        <a:spcAft>
+                          <a:spcPts val="800"/>
+                        </a:spcAft>
+                        <a:buNone/>
+                      </a:pPr>
+                      <a:r>
+                        <a:rPr lang="nl-NL" sz="1200" kern="0">
+                          <a:effectLst/>
+                        </a:rPr>
+                        <a:t>Doel</a:t>
+                      </a:r>
+                      <a:endParaRPr lang="nl-NL" sz="1200" kern="100">
+                        <a:effectLst/>
+                        <a:latin typeface="Aptos" panose="020B0004020202020204" pitchFamily="34" charset="0"/>
+                        <a:ea typeface="Aptos" panose="020B0004020202020204" pitchFamily="34" charset="0"/>
+                        <a:cs typeface="Times New Roman" panose="02020603050405020304" pitchFamily="18" charset="0"/>
+                      </a:endParaRPr>
+                    </a:p>
+                  </a:txBody>
+                  <a:tcPr marL="9525" marR="9525" marT="9525" marB="9525" anchor="ctr"/>
+                </a:tc>
+                <a:extLst>
+                  <a:ext uri="{0D108BD9-81ED-4DB2-BD59-A6C34878D82A}">
+                    <a16:rowId xmlns:a16="http://schemas.microsoft.com/office/drawing/2014/main" val="1548662051"/>
+                  </a:ext>
+                </a:extLst>
+              </a:tr>
+              <a:tr h="0">
+                <a:tc>
+                  <a:txBody>
+                    <a:bodyPr/>
+                    <a:lstStyle/>
+                    <a:p>
+                      <a:pPr>
+                        <a:lnSpc>
+                          <a:spcPct val="115000"/>
+                        </a:lnSpc>
+                        <a:spcAft>
+                          <a:spcPts val="800"/>
+                        </a:spcAft>
+                        <a:buNone/>
+                      </a:pPr>
+                      <a:r>
+                        <a:rPr lang="nl-NL" sz="1000" kern="0">
+                          <a:effectLst/>
+                        </a:rPr>
+                        <a:t>GET</a:t>
+                      </a:r>
+                      <a:endParaRPr lang="nl-NL" sz="1200" kern="100">
+                        <a:effectLst/>
+                        <a:latin typeface="Aptos" panose="020B0004020202020204" pitchFamily="34" charset="0"/>
+                        <a:ea typeface="Aptos" panose="020B0004020202020204" pitchFamily="34" charset="0"/>
+                        <a:cs typeface="Times New Roman" panose="02020603050405020304" pitchFamily="18" charset="0"/>
+                      </a:endParaRPr>
+                    </a:p>
+                  </a:txBody>
+                  <a:tcPr marL="9525" marR="9525" marT="9525" marB="9525" anchor="ctr"/>
+                </a:tc>
+                <a:tc>
+                  <a:txBody>
+                    <a:bodyPr/>
+                    <a:lstStyle/>
+                    <a:p>
+                      <a:pPr>
+                        <a:lnSpc>
+                          <a:spcPct val="115000"/>
+                        </a:lnSpc>
+                        <a:spcAft>
+                          <a:spcPts val="800"/>
+                        </a:spcAft>
+                        <a:buNone/>
+                      </a:pPr>
+                      <a:r>
+                        <a:rPr lang="nl-NL" sz="1000" kern="0">
+                          <a:effectLst/>
+                        </a:rPr>
+                        <a:t>/restservices/snake</a:t>
+                      </a:r>
+                      <a:endParaRPr lang="nl-NL" sz="1200" kern="100">
+                        <a:effectLst/>
+                        <a:latin typeface="Aptos" panose="020B0004020202020204" pitchFamily="34" charset="0"/>
+                        <a:ea typeface="Aptos" panose="020B0004020202020204" pitchFamily="34" charset="0"/>
+                        <a:cs typeface="Times New Roman" panose="02020603050405020304" pitchFamily="18" charset="0"/>
+                      </a:endParaRPr>
+                    </a:p>
+                  </a:txBody>
+                  <a:tcPr marL="9525" marR="9525" marT="9525" marB="9525" anchor="ctr"/>
+                </a:tc>
+                <a:tc>
+                  <a:txBody>
+                    <a:bodyPr/>
+                    <a:lstStyle/>
+                    <a:p>
+                      <a:pPr>
+                        <a:lnSpc>
+                          <a:spcPct val="115000"/>
+                        </a:lnSpc>
+                        <a:spcAft>
+                          <a:spcPts val="800"/>
+                        </a:spcAft>
+                        <a:buNone/>
+                      </a:pPr>
+                      <a:r>
+                        <a:rPr lang="nl-NL" sz="1200" kern="0">
+                          <a:effectLst/>
+                        </a:rPr>
+                        <a:t>Snake-instellingen ophalen</a:t>
+                      </a:r>
+                      <a:endParaRPr lang="nl-NL" sz="1200" kern="100">
+                        <a:effectLst/>
+                        <a:latin typeface="Aptos" panose="020B0004020202020204" pitchFamily="34" charset="0"/>
+                        <a:ea typeface="Aptos" panose="020B0004020202020204" pitchFamily="34" charset="0"/>
+                        <a:cs typeface="Times New Roman" panose="02020603050405020304" pitchFamily="18" charset="0"/>
+                      </a:endParaRPr>
+                    </a:p>
+                  </a:txBody>
+                  <a:tcPr marL="9525" marR="9525" marT="9525" marB="9525" anchor="ctr"/>
+                </a:tc>
+                <a:extLst>
+                  <a:ext uri="{0D108BD9-81ED-4DB2-BD59-A6C34878D82A}">
+                    <a16:rowId xmlns:a16="http://schemas.microsoft.com/office/drawing/2014/main" val="3509104635"/>
+                  </a:ext>
+                </a:extLst>
+              </a:tr>
+              <a:tr h="0">
+                <a:tc>
+                  <a:txBody>
+                    <a:bodyPr/>
+                    <a:lstStyle/>
+                    <a:p>
+                      <a:pPr>
+                        <a:lnSpc>
+                          <a:spcPct val="115000"/>
+                        </a:lnSpc>
+                        <a:spcAft>
+                          <a:spcPts val="800"/>
+                        </a:spcAft>
+                        <a:buNone/>
+                      </a:pPr>
+                      <a:r>
+                        <a:rPr lang="nl-NL" sz="1000" kern="0">
+                          <a:effectLst/>
+                        </a:rPr>
+                        <a:t>PATCH</a:t>
+                      </a:r>
+                      <a:endParaRPr lang="nl-NL" sz="1200" kern="100">
+                        <a:effectLst/>
+                        <a:latin typeface="Aptos" panose="020B0004020202020204" pitchFamily="34" charset="0"/>
+                        <a:ea typeface="Aptos" panose="020B0004020202020204" pitchFamily="34" charset="0"/>
+                        <a:cs typeface="Times New Roman" panose="02020603050405020304" pitchFamily="18" charset="0"/>
+                      </a:endParaRPr>
+                    </a:p>
+                  </a:txBody>
+                  <a:tcPr marL="9525" marR="9525" marT="9525" marB="9525" anchor="ctr"/>
+                </a:tc>
+                <a:tc>
+                  <a:txBody>
+                    <a:bodyPr/>
+                    <a:lstStyle/>
+                    <a:p>
+                      <a:pPr>
+                        <a:lnSpc>
+                          <a:spcPct val="115000"/>
+                        </a:lnSpc>
+                        <a:spcAft>
+                          <a:spcPts val="800"/>
+                        </a:spcAft>
+                        <a:buNone/>
+                      </a:pPr>
+                      <a:r>
+                        <a:rPr lang="nl-NL" sz="1000" kern="0">
+                          <a:effectLst/>
+                        </a:rPr>
+                        <a:t>/restservices/snake</a:t>
+                      </a:r>
+                      <a:endParaRPr lang="nl-NL" sz="1200" kern="100">
+                        <a:effectLst/>
+                        <a:latin typeface="Aptos" panose="020B0004020202020204" pitchFamily="34" charset="0"/>
+                        <a:ea typeface="Aptos" panose="020B0004020202020204" pitchFamily="34" charset="0"/>
+                        <a:cs typeface="Times New Roman" panose="02020603050405020304" pitchFamily="18" charset="0"/>
+                      </a:endParaRPr>
+                    </a:p>
+                  </a:txBody>
+                  <a:tcPr marL="9525" marR="9525" marT="9525" marB="9525" anchor="ctr"/>
+                </a:tc>
+                <a:tc>
+                  <a:txBody>
+                    <a:bodyPr/>
+                    <a:lstStyle/>
+                    <a:p>
+                      <a:pPr>
+                        <a:lnSpc>
+                          <a:spcPct val="115000"/>
+                        </a:lnSpc>
+                        <a:spcAft>
+                          <a:spcPts val="800"/>
+                        </a:spcAft>
+                        <a:buNone/>
+                      </a:pPr>
+                      <a:r>
+                        <a:rPr lang="nl-NL" sz="1200" kern="0">
+                          <a:effectLst/>
+                        </a:rPr>
+                        <a:t>Snake-instellingen gedeeltelijk aanpassen</a:t>
+                      </a:r>
+                      <a:endParaRPr lang="nl-NL" sz="1200" kern="100">
+                        <a:effectLst/>
+                        <a:latin typeface="Aptos" panose="020B0004020202020204" pitchFamily="34" charset="0"/>
+                        <a:ea typeface="Aptos" panose="020B0004020202020204" pitchFamily="34" charset="0"/>
+                        <a:cs typeface="Times New Roman" panose="02020603050405020304" pitchFamily="18" charset="0"/>
+                      </a:endParaRPr>
+                    </a:p>
+                  </a:txBody>
+                  <a:tcPr marL="9525" marR="9525" marT="9525" marB="9525" anchor="ctr"/>
+                </a:tc>
+                <a:extLst>
+                  <a:ext uri="{0D108BD9-81ED-4DB2-BD59-A6C34878D82A}">
+                    <a16:rowId xmlns:a16="http://schemas.microsoft.com/office/drawing/2014/main" val="1202145713"/>
+                  </a:ext>
+                </a:extLst>
+              </a:tr>
+              <a:tr h="0">
+                <a:tc>
+                  <a:txBody>
+                    <a:bodyPr/>
+                    <a:lstStyle/>
+                    <a:p>
+                      <a:pPr>
+                        <a:lnSpc>
+                          <a:spcPct val="115000"/>
+                        </a:lnSpc>
+                        <a:spcAft>
+                          <a:spcPts val="800"/>
+                        </a:spcAft>
+                        <a:buNone/>
+                      </a:pPr>
+                      <a:r>
+                        <a:rPr lang="nl-NL" sz="1000" kern="0">
+                          <a:effectLst/>
+                        </a:rPr>
+                        <a:t>POST</a:t>
+                      </a:r>
+                      <a:endParaRPr lang="nl-NL" sz="1200" kern="100">
+                        <a:effectLst/>
+                        <a:latin typeface="Aptos" panose="020B0004020202020204" pitchFamily="34" charset="0"/>
+                        <a:ea typeface="Aptos" panose="020B0004020202020204" pitchFamily="34" charset="0"/>
+                        <a:cs typeface="Times New Roman" panose="02020603050405020304" pitchFamily="18" charset="0"/>
+                      </a:endParaRPr>
+                    </a:p>
+                  </a:txBody>
+                  <a:tcPr marL="9525" marR="9525" marT="9525" marB="9525" anchor="ctr"/>
+                </a:tc>
+                <a:tc>
+                  <a:txBody>
+                    <a:bodyPr/>
+                    <a:lstStyle/>
+                    <a:p>
+                      <a:pPr>
+                        <a:lnSpc>
+                          <a:spcPct val="115000"/>
+                        </a:lnSpc>
+                        <a:spcAft>
+                          <a:spcPts val="800"/>
+                        </a:spcAft>
+                        <a:buNone/>
+                      </a:pPr>
+                      <a:r>
+                        <a:rPr lang="nl-NL" sz="1000" kern="0">
+                          <a:effectLst/>
+                        </a:rPr>
+                        <a:t>/restservices/authentication</a:t>
+                      </a:r>
+                      <a:endParaRPr lang="nl-NL" sz="1200" kern="100">
+                        <a:effectLst/>
+                        <a:latin typeface="Aptos" panose="020B0004020202020204" pitchFamily="34" charset="0"/>
+                        <a:ea typeface="Aptos" panose="020B0004020202020204" pitchFamily="34" charset="0"/>
+                        <a:cs typeface="Times New Roman" panose="02020603050405020304" pitchFamily="18" charset="0"/>
+                      </a:endParaRPr>
+                    </a:p>
+                  </a:txBody>
+                  <a:tcPr marL="9525" marR="9525" marT="9525" marB="9525" anchor="ctr"/>
+                </a:tc>
+                <a:tc>
+                  <a:txBody>
+                    <a:bodyPr/>
+                    <a:lstStyle/>
+                    <a:p>
+                      <a:pPr>
+                        <a:lnSpc>
+                          <a:spcPct val="115000"/>
+                        </a:lnSpc>
+                        <a:spcAft>
+                          <a:spcPts val="800"/>
+                        </a:spcAft>
+                        <a:buNone/>
+                      </a:pPr>
+                      <a:r>
+                        <a:rPr lang="nl-NL" sz="1200" kern="0">
+                          <a:effectLst/>
+                        </a:rPr>
+                        <a:t>Inloggen en JWT-token ontvangen</a:t>
+                      </a:r>
+                      <a:endParaRPr lang="nl-NL" sz="1200" kern="100">
+                        <a:effectLst/>
+                        <a:latin typeface="Aptos" panose="020B0004020202020204" pitchFamily="34" charset="0"/>
+                        <a:ea typeface="Aptos" panose="020B0004020202020204" pitchFamily="34" charset="0"/>
+                        <a:cs typeface="Times New Roman" panose="02020603050405020304" pitchFamily="18" charset="0"/>
+                      </a:endParaRPr>
+                    </a:p>
+                  </a:txBody>
+                  <a:tcPr marL="9525" marR="9525" marT="9525" marB="9525" anchor="ctr"/>
+                </a:tc>
+                <a:extLst>
+                  <a:ext uri="{0D108BD9-81ED-4DB2-BD59-A6C34878D82A}">
+                    <a16:rowId xmlns:a16="http://schemas.microsoft.com/office/drawing/2014/main" val="2037191001"/>
+                  </a:ext>
+                </a:extLst>
+              </a:tr>
+              <a:tr h="0">
+                <a:tc>
+                  <a:txBody>
+                    <a:bodyPr/>
+                    <a:lstStyle/>
+                    <a:p>
+                      <a:pPr>
+                        <a:lnSpc>
+                          <a:spcPct val="115000"/>
+                        </a:lnSpc>
+                        <a:spcAft>
+                          <a:spcPts val="800"/>
+                        </a:spcAft>
+                        <a:buNone/>
+                      </a:pPr>
+                      <a:r>
+                        <a:rPr lang="nl-NL" sz="1000" kern="0">
+                          <a:effectLst/>
+                        </a:rPr>
+                        <a:t>GET</a:t>
+                      </a:r>
+                      <a:endParaRPr lang="nl-NL" sz="1200" kern="100">
+                        <a:effectLst/>
+                        <a:latin typeface="Aptos" panose="020B0004020202020204" pitchFamily="34" charset="0"/>
+                        <a:ea typeface="Aptos" panose="020B0004020202020204" pitchFamily="34" charset="0"/>
+                        <a:cs typeface="Times New Roman" panose="02020603050405020304" pitchFamily="18" charset="0"/>
+                      </a:endParaRPr>
+                    </a:p>
+                  </a:txBody>
+                  <a:tcPr marL="9525" marR="9525" marT="9525" marB="9525" anchor="ctr"/>
+                </a:tc>
+                <a:tc>
+                  <a:txBody>
+                    <a:bodyPr/>
+                    <a:lstStyle/>
+                    <a:p>
+                      <a:pPr>
+                        <a:lnSpc>
+                          <a:spcPct val="115000"/>
+                        </a:lnSpc>
+                        <a:spcAft>
+                          <a:spcPts val="800"/>
+                        </a:spcAft>
+                        <a:buNone/>
+                      </a:pPr>
+                      <a:r>
+                        <a:rPr lang="nl-NL" sz="1000" kern="0" dirty="0">
+                          <a:effectLst/>
+                        </a:rPr>
+                        <a:t>/restservices/games</a:t>
+                      </a:r>
+                      <a:endParaRPr lang="nl-NL" sz="1200" kern="100" dirty="0">
+                        <a:effectLst/>
+                        <a:latin typeface="Aptos" panose="020B0004020202020204" pitchFamily="34" charset="0"/>
+                        <a:ea typeface="Aptos" panose="020B0004020202020204" pitchFamily="34" charset="0"/>
+                        <a:cs typeface="Times New Roman" panose="02020603050405020304" pitchFamily="18" charset="0"/>
+                      </a:endParaRPr>
+                    </a:p>
+                  </a:txBody>
+                  <a:tcPr marL="9525" marR="9525" marT="9525" marB="9525" anchor="ctr"/>
+                </a:tc>
+                <a:tc>
+                  <a:txBody>
+                    <a:bodyPr/>
+                    <a:lstStyle/>
+                    <a:p>
+                      <a:pPr>
+                        <a:lnSpc>
+                          <a:spcPct val="115000"/>
+                        </a:lnSpc>
+                        <a:spcAft>
+                          <a:spcPts val="800"/>
+                        </a:spcAft>
+                        <a:buNone/>
+                      </a:pPr>
+                      <a:r>
+                        <a:rPr lang="nl-NL" sz="1200" kern="0">
+                          <a:effectLst/>
+                        </a:rPr>
+                        <a:t>Alle gespeelde games ophalen</a:t>
+                      </a:r>
+                      <a:endParaRPr lang="nl-NL" sz="1200" kern="100">
+                        <a:effectLst/>
+                        <a:latin typeface="Aptos" panose="020B0004020202020204" pitchFamily="34" charset="0"/>
+                        <a:ea typeface="Aptos" panose="020B0004020202020204" pitchFamily="34" charset="0"/>
+                        <a:cs typeface="Times New Roman" panose="02020603050405020304" pitchFamily="18" charset="0"/>
+                      </a:endParaRPr>
+                    </a:p>
+                  </a:txBody>
+                  <a:tcPr marL="9525" marR="9525" marT="9525" marB="9525" anchor="ctr"/>
+                </a:tc>
+                <a:extLst>
+                  <a:ext uri="{0D108BD9-81ED-4DB2-BD59-A6C34878D82A}">
+                    <a16:rowId xmlns:a16="http://schemas.microsoft.com/office/drawing/2014/main" val="673926862"/>
+                  </a:ext>
+                </a:extLst>
+              </a:tr>
+              <a:tr h="0">
+                <a:tc>
+                  <a:txBody>
+                    <a:bodyPr/>
+                    <a:lstStyle/>
+                    <a:p>
+                      <a:pPr>
+                        <a:lnSpc>
+                          <a:spcPct val="115000"/>
+                        </a:lnSpc>
+                        <a:spcAft>
+                          <a:spcPts val="800"/>
+                        </a:spcAft>
+                        <a:buNone/>
+                      </a:pPr>
+                      <a:r>
+                        <a:rPr lang="nl-NL" sz="1000" kern="0">
+                          <a:effectLst/>
+                        </a:rPr>
+                        <a:t>GET</a:t>
+                      </a:r>
+                      <a:endParaRPr lang="nl-NL" sz="1200" kern="100">
+                        <a:effectLst/>
+                        <a:latin typeface="Aptos" panose="020B0004020202020204" pitchFamily="34" charset="0"/>
+                        <a:ea typeface="Aptos" panose="020B0004020202020204" pitchFamily="34" charset="0"/>
+                        <a:cs typeface="Times New Roman" panose="02020603050405020304" pitchFamily="18" charset="0"/>
+                      </a:endParaRPr>
+                    </a:p>
+                  </a:txBody>
+                  <a:tcPr marL="9525" marR="9525" marT="9525" marB="9525" anchor="ctr"/>
+                </a:tc>
+                <a:tc>
+                  <a:txBody>
+                    <a:bodyPr/>
+                    <a:lstStyle/>
+                    <a:p>
+                      <a:pPr>
+                        <a:lnSpc>
+                          <a:spcPct val="115000"/>
+                        </a:lnSpc>
+                        <a:spcAft>
+                          <a:spcPts val="800"/>
+                        </a:spcAft>
+                        <a:buNone/>
+                      </a:pPr>
+                      <a:r>
+                        <a:rPr lang="nl-NL" sz="1000" kern="0" dirty="0">
+                          <a:effectLst/>
+                        </a:rPr>
+                        <a:t>/restservices/games/{</a:t>
+                      </a:r>
+                      <a:r>
+                        <a:rPr lang="nl-NL" sz="1000" kern="0" dirty="0" err="1">
+                          <a:effectLst/>
+                        </a:rPr>
+                        <a:t>gameId</a:t>
+                      </a:r>
+                      <a:r>
+                        <a:rPr lang="nl-NL" sz="1000" kern="0" dirty="0">
+                          <a:effectLst/>
+                        </a:rPr>
+                        <a:t>}</a:t>
+                      </a:r>
+                      <a:endParaRPr lang="nl-NL" sz="1200" kern="100" dirty="0">
+                        <a:effectLst/>
+                        <a:latin typeface="Aptos" panose="020B0004020202020204" pitchFamily="34" charset="0"/>
+                        <a:ea typeface="Aptos" panose="020B0004020202020204" pitchFamily="34" charset="0"/>
+                        <a:cs typeface="Times New Roman" panose="02020603050405020304" pitchFamily="18" charset="0"/>
+                      </a:endParaRPr>
+                    </a:p>
+                  </a:txBody>
+                  <a:tcPr marL="9525" marR="9525" marT="9525" marB="9525" anchor="ctr"/>
+                </a:tc>
+                <a:tc>
+                  <a:txBody>
+                    <a:bodyPr/>
+                    <a:lstStyle/>
+                    <a:p>
+                      <a:pPr>
+                        <a:lnSpc>
+                          <a:spcPct val="115000"/>
+                        </a:lnSpc>
+                        <a:spcAft>
+                          <a:spcPts val="800"/>
+                        </a:spcAft>
+                        <a:buNone/>
+                      </a:pPr>
+                      <a:r>
+                        <a:rPr lang="nl-NL" sz="1200" kern="0">
+                          <a:effectLst/>
+                        </a:rPr>
+                        <a:t>Eén specifieke game ophalen</a:t>
+                      </a:r>
+                      <a:endParaRPr lang="nl-NL" sz="1200" kern="100">
+                        <a:effectLst/>
+                        <a:latin typeface="Aptos" panose="020B0004020202020204" pitchFamily="34" charset="0"/>
+                        <a:ea typeface="Aptos" panose="020B0004020202020204" pitchFamily="34" charset="0"/>
+                        <a:cs typeface="Times New Roman" panose="02020603050405020304" pitchFamily="18" charset="0"/>
+                      </a:endParaRPr>
+                    </a:p>
+                  </a:txBody>
+                  <a:tcPr marL="9525" marR="9525" marT="9525" marB="9525" anchor="ctr"/>
+                </a:tc>
+                <a:extLst>
+                  <a:ext uri="{0D108BD9-81ED-4DB2-BD59-A6C34878D82A}">
+                    <a16:rowId xmlns:a16="http://schemas.microsoft.com/office/drawing/2014/main" val="3866300099"/>
+                  </a:ext>
+                </a:extLst>
+              </a:tr>
+              <a:tr h="0">
+                <a:tc>
+                  <a:txBody>
+                    <a:bodyPr/>
+                    <a:lstStyle/>
+                    <a:p>
+                      <a:pPr>
+                        <a:lnSpc>
+                          <a:spcPct val="115000"/>
+                        </a:lnSpc>
+                        <a:spcAft>
+                          <a:spcPts val="800"/>
+                        </a:spcAft>
+                        <a:buNone/>
+                      </a:pPr>
+                      <a:r>
+                        <a:rPr lang="nl-NL" sz="1000" kern="0">
+                          <a:effectLst/>
+                        </a:rPr>
+                        <a:t>DELETE</a:t>
+                      </a:r>
+                      <a:endParaRPr lang="nl-NL" sz="1200" kern="100">
+                        <a:effectLst/>
+                        <a:latin typeface="Aptos" panose="020B0004020202020204" pitchFamily="34" charset="0"/>
+                        <a:ea typeface="Aptos" panose="020B0004020202020204" pitchFamily="34" charset="0"/>
+                        <a:cs typeface="Times New Roman" panose="02020603050405020304" pitchFamily="18" charset="0"/>
+                      </a:endParaRPr>
+                    </a:p>
+                  </a:txBody>
+                  <a:tcPr marL="9525" marR="9525" marT="9525" marB="9525" anchor="ctr"/>
+                </a:tc>
+                <a:tc>
+                  <a:txBody>
+                    <a:bodyPr/>
+                    <a:lstStyle/>
+                    <a:p>
+                      <a:pPr>
+                        <a:lnSpc>
+                          <a:spcPct val="115000"/>
+                        </a:lnSpc>
+                        <a:spcAft>
+                          <a:spcPts val="800"/>
+                        </a:spcAft>
+                        <a:buNone/>
+                      </a:pPr>
+                      <a:r>
+                        <a:rPr lang="nl-NL" sz="1000" kern="0" dirty="0">
+                          <a:effectLst/>
+                        </a:rPr>
+                        <a:t>/restservices/games/{</a:t>
+                      </a:r>
+                      <a:r>
+                        <a:rPr lang="nl-NL" sz="1000" kern="0" dirty="0" err="1">
+                          <a:effectLst/>
+                        </a:rPr>
+                        <a:t>gameId</a:t>
+                      </a:r>
+                      <a:r>
+                        <a:rPr lang="nl-NL" sz="1000" kern="0" dirty="0">
+                          <a:effectLst/>
+                        </a:rPr>
+                        <a:t>}</a:t>
+                      </a:r>
+                      <a:endParaRPr lang="nl-NL" sz="1200" kern="100" dirty="0">
+                        <a:effectLst/>
+                        <a:latin typeface="Aptos" panose="020B0004020202020204" pitchFamily="34" charset="0"/>
+                        <a:ea typeface="Aptos" panose="020B0004020202020204" pitchFamily="34" charset="0"/>
+                        <a:cs typeface="Times New Roman" panose="02020603050405020304" pitchFamily="18" charset="0"/>
+                      </a:endParaRPr>
+                    </a:p>
+                  </a:txBody>
+                  <a:tcPr marL="9525" marR="9525" marT="9525" marB="9525" anchor="ctr"/>
+                </a:tc>
+                <a:tc>
+                  <a:txBody>
+                    <a:bodyPr/>
+                    <a:lstStyle/>
+                    <a:p>
+                      <a:pPr>
+                        <a:lnSpc>
+                          <a:spcPct val="115000"/>
+                        </a:lnSpc>
+                        <a:spcAft>
+                          <a:spcPts val="800"/>
+                        </a:spcAft>
+                        <a:buNone/>
+                      </a:pPr>
+                      <a:r>
+                        <a:rPr lang="nl-NL" sz="1200" kern="0">
+                          <a:effectLst/>
+                        </a:rPr>
+                        <a:t>Eén specifieke game verwijderen</a:t>
+                      </a:r>
+                      <a:endParaRPr lang="nl-NL" sz="1200" kern="100">
+                        <a:effectLst/>
+                        <a:latin typeface="Aptos" panose="020B0004020202020204" pitchFamily="34" charset="0"/>
+                        <a:ea typeface="Aptos" panose="020B0004020202020204" pitchFamily="34" charset="0"/>
+                        <a:cs typeface="Times New Roman" panose="02020603050405020304" pitchFamily="18" charset="0"/>
+                      </a:endParaRPr>
+                    </a:p>
+                  </a:txBody>
+                  <a:tcPr marL="9525" marR="9525" marT="9525" marB="9525" anchor="ctr"/>
+                </a:tc>
+                <a:extLst>
+                  <a:ext uri="{0D108BD9-81ED-4DB2-BD59-A6C34878D82A}">
+                    <a16:rowId xmlns:a16="http://schemas.microsoft.com/office/drawing/2014/main" val="1023142119"/>
+                  </a:ext>
+                </a:extLst>
+              </a:tr>
+              <a:tr h="0">
+                <a:tc>
+                  <a:txBody>
+                    <a:bodyPr/>
+                    <a:lstStyle/>
+                    <a:p>
+                      <a:pPr>
+                        <a:lnSpc>
+                          <a:spcPct val="115000"/>
+                        </a:lnSpc>
+                        <a:spcAft>
+                          <a:spcPts val="800"/>
+                        </a:spcAft>
+                        <a:buNone/>
+                      </a:pPr>
+                      <a:r>
+                        <a:rPr lang="nl-NL" sz="1000" kern="0" dirty="0">
+                          <a:effectLst/>
+                        </a:rPr>
+                        <a:t>x</a:t>
+                      </a:r>
+                      <a:endParaRPr lang="nl-NL" sz="1200" kern="100" dirty="0">
+                        <a:effectLst/>
+                        <a:latin typeface="Aptos" panose="020B0004020202020204" pitchFamily="34" charset="0"/>
+                        <a:ea typeface="Aptos" panose="020B0004020202020204" pitchFamily="34" charset="0"/>
+                        <a:cs typeface="Times New Roman" panose="02020603050405020304" pitchFamily="18" charset="0"/>
+                      </a:endParaRPr>
+                    </a:p>
+                  </a:txBody>
+                  <a:tcPr marL="9525" marR="9525" marT="9525" marB="9525" anchor="ctr"/>
+                </a:tc>
+                <a:tc>
+                  <a:txBody>
+                    <a:bodyPr/>
+                    <a:lstStyle/>
+                    <a:p>
+                      <a:pPr>
+                        <a:lnSpc>
+                          <a:spcPct val="115000"/>
+                        </a:lnSpc>
+                        <a:spcAft>
+                          <a:spcPts val="800"/>
+                        </a:spcAft>
+                        <a:buNone/>
+                      </a:pPr>
+                      <a:r>
+                        <a:rPr lang="nl-NL" sz="1000" kern="0" dirty="0">
+                          <a:effectLst/>
+                        </a:rPr>
+                        <a:t>/restservices</a:t>
+                      </a:r>
+                      <a:endParaRPr lang="nl-NL" sz="1200" kern="100" dirty="0">
+                        <a:effectLst/>
+                        <a:latin typeface="Aptos" panose="020B0004020202020204" pitchFamily="34" charset="0"/>
+                        <a:ea typeface="Aptos" panose="020B0004020202020204" pitchFamily="34" charset="0"/>
+                        <a:cs typeface="Times New Roman" panose="02020603050405020304" pitchFamily="18" charset="0"/>
+                      </a:endParaRPr>
+                    </a:p>
+                  </a:txBody>
+                  <a:tcPr marL="9525" marR="9525" marT="9525" marB="9525" anchor="ctr"/>
+                </a:tc>
+                <a:tc>
+                  <a:txBody>
+                    <a:bodyPr/>
+                    <a:lstStyle/>
+                    <a:p>
+                      <a:pPr>
+                        <a:lnSpc>
+                          <a:spcPct val="115000"/>
+                        </a:lnSpc>
+                        <a:spcAft>
+                          <a:spcPts val="800"/>
+                        </a:spcAft>
+                        <a:buNone/>
+                      </a:pPr>
+                      <a:r>
+                        <a:rPr lang="nl-NL" sz="1200" kern="0" dirty="0" err="1">
+                          <a:effectLst/>
+                        </a:rPr>
+                        <a:t>BattleSnake</a:t>
+                      </a:r>
+                      <a:r>
+                        <a:rPr lang="nl-NL" sz="1200" kern="0" dirty="0">
+                          <a:effectLst/>
+                        </a:rPr>
+                        <a:t> info ophalen</a:t>
+                      </a:r>
+                      <a:endParaRPr lang="nl-NL" sz="1200" kern="100" dirty="0">
+                        <a:effectLst/>
+                        <a:latin typeface="Aptos" panose="020B0004020202020204" pitchFamily="34" charset="0"/>
+                        <a:ea typeface="Aptos" panose="020B0004020202020204" pitchFamily="34" charset="0"/>
+                        <a:cs typeface="Times New Roman" panose="02020603050405020304" pitchFamily="18" charset="0"/>
+                      </a:endParaRPr>
+                    </a:p>
+                  </a:txBody>
+                  <a:tcPr marL="9525" marR="9525" marT="9525" marB="9525" anchor="ctr"/>
+                </a:tc>
+                <a:extLst>
+                  <a:ext uri="{0D108BD9-81ED-4DB2-BD59-A6C34878D82A}">
+                    <a16:rowId xmlns:a16="http://schemas.microsoft.com/office/drawing/2014/main" val="2996966093"/>
+                  </a:ext>
+                </a:extLst>
+              </a:tr>
+              <a:tr h="0">
+                <a:tc>
+                  <a:txBody>
+                    <a:bodyPr/>
+                    <a:lstStyle/>
+                    <a:p>
+                      <a:pPr>
+                        <a:lnSpc>
+                          <a:spcPct val="115000"/>
+                        </a:lnSpc>
+                        <a:spcAft>
+                          <a:spcPts val="800"/>
+                        </a:spcAft>
+                        <a:buNone/>
+                      </a:pPr>
+                      <a:r>
+                        <a:rPr lang="nl-NL" sz="1000" kern="0">
+                          <a:effectLst/>
+                        </a:rPr>
+                        <a:t>POST</a:t>
+                      </a:r>
+                      <a:endParaRPr lang="nl-NL" sz="1200" kern="100">
+                        <a:effectLst/>
+                        <a:latin typeface="Aptos" panose="020B0004020202020204" pitchFamily="34" charset="0"/>
+                        <a:ea typeface="Aptos" panose="020B0004020202020204" pitchFamily="34" charset="0"/>
+                        <a:cs typeface="Times New Roman" panose="02020603050405020304" pitchFamily="18" charset="0"/>
+                      </a:endParaRPr>
+                    </a:p>
+                  </a:txBody>
+                  <a:tcPr marL="9525" marR="9525" marT="9525" marB="9525" anchor="ctr"/>
+                </a:tc>
+                <a:tc>
+                  <a:txBody>
+                    <a:bodyPr/>
+                    <a:lstStyle/>
+                    <a:p>
+                      <a:pPr>
+                        <a:lnSpc>
+                          <a:spcPct val="115000"/>
+                        </a:lnSpc>
+                        <a:spcAft>
+                          <a:spcPts val="800"/>
+                        </a:spcAft>
+                        <a:buNone/>
+                      </a:pPr>
+                      <a:r>
+                        <a:rPr lang="nl-NL" sz="1000" kern="0" dirty="0">
+                          <a:effectLst/>
+                        </a:rPr>
+                        <a:t>/restservices/start</a:t>
+                      </a:r>
+                      <a:endParaRPr lang="nl-NL" sz="1200" kern="100" dirty="0">
+                        <a:effectLst/>
+                        <a:latin typeface="Aptos" panose="020B0004020202020204" pitchFamily="34" charset="0"/>
+                        <a:ea typeface="Aptos" panose="020B0004020202020204" pitchFamily="34" charset="0"/>
+                        <a:cs typeface="Times New Roman" panose="02020603050405020304" pitchFamily="18" charset="0"/>
+                      </a:endParaRPr>
+                    </a:p>
+                  </a:txBody>
+                  <a:tcPr marL="9525" marR="9525" marT="9525" marB="9525" anchor="ctr"/>
+                </a:tc>
+                <a:tc>
+                  <a:txBody>
+                    <a:bodyPr/>
+                    <a:lstStyle/>
+                    <a:p>
+                      <a:pPr>
+                        <a:lnSpc>
+                          <a:spcPct val="115000"/>
+                        </a:lnSpc>
+                        <a:spcAft>
+                          <a:spcPts val="800"/>
+                        </a:spcAft>
+                        <a:buNone/>
+                      </a:pPr>
+                      <a:r>
+                        <a:rPr lang="nl-NL" sz="1200" kern="0">
+                          <a:effectLst/>
+                        </a:rPr>
+                        <a:t>BattleSnake start webhook</a:t>
+                      </a:r>
+                      <a:endParaRPr lang="nl-NL" sz="1200" kern="100">
+                        <a:effectLst/>
+                        <a:latin typeface="Aptos" panose="020B0004020202020204" pitchFamily="34" charset="0"/>
+                        <a:ea typeface="Aptos" panose="020B0004020202020204" pitchFamily="34" charset="0"/>
+                        <a:cs typeface="Times New Roman" panose="02020603050405020304" pitchFamily="18" charset="0"/>
+                      </a:endParaRPr>
+                    </a:p>
+                  </a:txBody>
+                  <a:tcPr marL="9525" marR="9525" marT="9525" marB="9525" anchor="ctr"/>
+                </a:tc>
+                <a:extLst>
+                  <a:ext uri="{0D108BD9-81ED-4DB2-BD59-A6C34878D82A}">
+                    <a16:rowId xmlns:a16="http://schemas.microsoft.com/office/drawing/2014/main" val="1222406510"/>
+                  </a:ext>
+                </a:extLst>
+              </a:tr>
+              <a:tr h="0">
+                <a:tc>
+                  <a:txBody>
+                    <a:bodyPr/>
+                    <a:lstStyle/>
+                    <a:p>
+                      <a:pPr>
+                        <a:lnSpc>
+                          <a:spcPct val="115000"/>
+                        </a:lnSpc>
+                        <a:spcAft>
+                          <a:spcPts val="800"/>
+                        </a:spcAft>
+                        <a:buNone/>
+                      </a:pPr>
+                      <a:r>
+                        <a:rPr lang="nl-NL" sz="1000" kern="0">
+                          <a:effectLst/>
+                        </a:rPr>
+                        <a:t>POST</a:t>
+                      </a:r>
+                      <a:endParaRPr lang="nl-NL" sz="1200" kern="100">
+                        <a:effectLst/>
+                        <a:latin typeface="Aptos" panose="020B0004020202020204" pitchFamily="34" charset="0"/>
+                        <a:ea typeface="Aptos" panose="020B0004020202020204" pitchFamily="34" charset="0"/>
+                        <a:cs typeface="Times New Roman" panose="02020603050405020304" pitchFamily="18" charset="0"/>
+                      </a:endParaRPr>
+                    </a:p>
+                  </a:txBody>
+                  <a:tcPr marL="9525" marR="9525" marT="9525" marB="9525" anchor="ctr"/>
+                </a:tc>
+                <a:tc>
+                  <a:txBody>
+                    <a:bodyPr/>
+                    <a:lstStyle/>
+                    <a:p>
+                      <a:pPr>
+                        <a:lnSpc>
+                          <a:spcPct val="115000"/>
+                        </a:lnSpc>
+                        <a:spcAft>
+                          <a:spcPts val="800"/>
+                        </a:spcAft>
+                        <a:buNone/>
+                      </a:pPr>
+                      <a:r>
+                        <a:rPr lang="nl-NL" sz="1000" kern="0" dirty="0">
+                          <a:effectLst/>
+                        </a:rPr>
+                        <a:t>/restservices/move</a:t>
+                      </a:r>
+                      <a:endParaRPr lang="nl-NL" sz="1200" kern="100" dirty="0">
+                        <a:effectLst/>
+                        <a:latin typeface="Aptos" panose="020B0004020202020204" pitchFamily="34" charset="0"/>
+                        <a:ea typeface="Aptos" panose="020B0004020202020204" pitchFamily="34" charset="0"/>
+                        <a:cs typeface="Times New Roman" panose="02020603050405020304" pitchFamily="18" charset="0"/>
+                      </a:endParaRPr>
+                    </a:p>
+                  </a:txBody>
+                  <a:tcPr marL="9525" marR="9525" marT="9525" marB="9525" anchor="ctr"/>
+                </a:tc>
+                <a:tc>
+                  <a:txBody>
+                    <a:bodyPr/>
+                    <a:lstStyle/>
+                    <a:p>
+                      <a:pPr>
+                        <a:lnSpc>
+                          <a:spcPct val="115000"/>
+                        </a:lnSpc>
+                        <a:spcAft>
+                          <a:spcPts val="800"/>
+                        </a:spcAft>
+                        <a:buNone/>
+                      </a:pPr>
+                      <a:r>
+                        <a:rPr lang="nl-NL" sz="1200" kern="0">
+                          <a:effectLst/>
+                        </a:rPr>
+                        <a:t>BattleSnake move webhook</a:t>
+                      </a:r>
+                      <a:endParaRPr lang="nl-NL" sz="1200" kern="100">
+                        <a:effectLst/>
+                        <a:latin typeface="Aptos" panose="020B0004020202020204" pitchFamily="34" charset="0"/>
+                        <a:ea typeface="Aptos" panose="020B0004020202020204" pitchFamily="34" charset="0"/>
+                        <a:cs typeface="Times New Roman" panose="02020603050405020304" pitchFamily="18" charset="0"/>
+                      </a:endParaRPr>
+                    </a:p>
+                  </a:txBody>
+                  <a:tcPr marL="9525" marR="9525" marT="9525" marB="9525" anchor="ctr"/>
+                </a:tc>
+                <a:extLst>
+                  <a:ext uri="{0D108BD9-81ED-4DB2-BD59-A6C34878D82A}">
+                    <a16:rowId xmlns:a16="http://schemas.microsoft.com/office/drawing/2014/main" val="2392905972"/>
+                  </a:ext>
+                </a:extLst>
+              </a:tr>
+              <a:tr h="0">
+                <a:tc>
+                  <a:txBody>
+                    <a:bodyPr/>
+                    <a:lstStyle/>
+                    <a:p>
+                      <a:pPr>
+                        <a:lnSpc>
+                          <a:spcPct val="115000"/>
+                        </a:lnSpc>
+                        <a:spcAft>
+                          <a:spcPts val="800"/>
+                        </a:spcAft>
+                        <a:buNone/>
+                      </a:pPr>
+                      <a:r>
+                        <a:rPr lang="nl-NL" sz="1000" kern="0" dirty="0">
+                          <a:effectLst/>
+                        </a:rPr>
+                        <a:t>POST</a:t>
+                      </a:r>
+                      <a:endParaRPr lang="nl-NL" sz="1200" kern="100" dirty="0">
+                        <a:effectLst/>
+                        <a:latin typeface="Aptos" panose="020B0004020202020204" pitchFamily="34" charset="0"/>
+                        <a:ea typeface="Aptos" panose="020B0004020202020204" pitchFamily="34" charset="0"/>
+                        <a:cs typeface="Times New Roman" panose="02020603050405020304" pitchFamily="18" charset="0"/>
+                      </a:endParaRPr>
+                    </a:p>
+                  </a:txBody>
+                  <a:tcPr marL="9525" marR="9525" marT="9525" marB="9525" anchor="ctr"/>
+                </a:tc>
+                <a:tc>
+                  <a:txBody>
+                    <a:bodyPr/>
+                    <a:lstStyle/>
+                    <a:p>
+                      <a:pPr>
+                        <a:lnSpc>
+                          <a:spcPct val="115000"/>
+                        </a:lnSpc>
+                        <a:spcAft>
+                          <a:spcPts val="800"/>
+                        </a:spcAft>
+                        <a:buNone/>
+                      </a:pPr>
+                      <a:r>
+                        <a:rPr lang="nl-NL" sz="1000" kern="0">
+                          <a:effectLst/>
+                        </a:rPr>
+                        <a:t>/restservices/end</a:t>
+                      </a:r>
+                      <a:endParaRPr lang="nl-NL" sz="1200" kern="100">
+                        <a:effectLst/>
+                        <a:latin typeface="Aptos" panose="020B0004020202020204" pitchFamily="34" charset="0"/>
+                        <a:ea typeface="Aptos" panose="020B0004020202020204" pitchFamily="34" charset="0"/>
+                        <a:cs typeface="Times New Roman" panose="02020603050405020304" pitchFamily="18" charset="0"/>
+                      </a:endParaRPr>
+                    </a:p>
+                  </a:txBody>
+                  <a:tcPr marL="9525" marR="9525" marT="9525" marB="9525" anchor="ctr"/>
+                </a:tc>
+                <a:tc>
+                  <a:txBody>
+                    <a:bodyPr/>
+                    <a:lstStyle/>
+                    <a:p>
+                      <a:pPr>
+                        <a:lnSpc>
+                          <a:spcPct val="115000"/>
+                        </a:lnSpc>
+                        <a:spcAft>
+                          <a:spcPts val="800"/>
+                        </a:spcAft>
+                        <a:buNone/>
+                      </a:pPr>
+                      <a:r>
+                        <a:rPr lang="nl-NL" sz="1200" kern="0" dirty="0" err="1">
+                          <a:effectLst/>
+                        </a:rPr>
+                        <a:t>BattleSnake</a:t>
+                      </a:r>
+                      <a:r>
+                        <a:rPr lang="nl-NL" sz="1200" kern="0" dirty="0">
+                          <a:effectLst/>
+                        </a:rPr>
+                        <a:t> end </a:t>
+                      </a:r>
+                      <a:r>
+                        <a:rPr lang="nl-NL" sz="1200" kern="0" dirty="0" err="1">
+                          <a:effectLst/>
+                        </a:rPr>
+                        <a:t>webhook</a:t>
+                      </a:r>
+                      <a:endParaRPr lang="nl-NL" sz="1200" kern="100" dirty="0">
+                        <a:effectLst/>
+                        <a:latin typeface="Aptos" panose="020B0004020202020204" pitchFamily="34" charset="0"/>
+                        <a:ea typeface="Aptos" panose="020B0004020202020204" pitchFamily="34" charset="0"/>
+                        <a:cs typeface="Times New Roman" panose="02020603050405020304" pitchFamily="18" charset="0"/>
+                      </a:endParaRPr>
+                    </a:p>
+                  </a:txBody>
+                  <a:tcPr marL="9525" marR="9525" marT="9525" marB="9525" anchor="ctr"/>
+                </a:tc>
+                <a:extLst>
+                  <a:ext uri="{0D108BD9-81ED-4DB2-BD59-A6C34878D82A}">
+                    <a16:rowId xmlns:a16="http://schemas.microsoft.com/office/drawing/2014/main" val="2428287363"/>
+                  </a:ext>
+                </a:extLst>
+              </a:tr>
+            </a:tbl>
+          </a:graphicData>
+        </a:graphic>
+      </p:graphicFrame>
     </p:spTree>
     <p:extLst>
       <p:ext uri="{BB962C8B-B14F-4D97-AF65-F5344CB8AC3E}">
@@ -6237,12 +7844,319 @@
             <p:ph idx="1"/>
           </p:nvPr>
         </p:nvSpPr>
-        <p:spPr/>
-        <p:txBody>
-          <a:bodyPr/>
-          <a:lstStyle/>
-          <a:p>
-            <a:endParaRPr lang="nl-NL"/>
+        <p:spPr>
+          <a:xfrm>
+            <a:off x="2493474" y="1602889"/>
+            <a:ext cx="7637929" cy="1703854"/>
+          </a:xfrm>
+        </p:spPr>
+        <p:txBody>
+          <a:bodyPr>
+            <a:normAutofit/>
+          </a:bodyPr>
+          <a:lstStyle/>
+          <a:p>
+            <a:r>
+              <a:rPr lang="nl-NL" sz="1500" dirty="0"/>
+              <a:t>login-</a:t>
+            </a:r>
+            <a:r>
+              <a:rPr lang="nl-NL" sz="1500" dirty="0" err="1"/>
+              <a:t>service.js</a:t>
+            </a:r>
+            <a:r>
+              <a:rPr lang="nl-NL" sz="1500" dirty="0"/>
+              <a:t> → POST /restservices/</a:t>
+            </a:r>
+            <a:r>
+              <a:rPr lang="nl-NL" sz="1500" dirty="0" err="1"/>
+              <a:t>authentication</a:t>
+            </a:r>
+            <a:r>
+              <a:rPr lang="nl-NL" sz="1500" dirty="0"/>
+              <a:t> + JWT opslaan</a:t>
+            </a:r>
+          </a:p>
+          <a:p>
+            <a:r>
+              <a:rPr lang="nl-NL" sz="1500" dirty="0" err="1"/>
+              <a:t>snake-service.js</a:t>
+            </a:r>
+            <a:r>
+              <a:rPr lang="nl-NL" sz="1500" dirty="0"/>
+              <a:t> → GET /restservices/</a:t>
+            </a:r>
+            <a:r>
+              <a:rPr lang="nl-NL" sz="1500" dirty="0" err="1"/>
+              <a:t>snake</a:t>
+            </a:r>
+            <a:r>
+              <a:rPr lang="nl-NL" sz="1500" dirty="0"/>
+              <a:t> + PATCH /restservices/</a:t>
+            </a:r>
+            <a:r>
+              <a:rPr lang="nl-NL" sz="1500" dirty="0" err="1"/>
+              <a:t>snake</a:t>
+            </a:r>
+            <a:r>
+              <a:rPr lang="nl-NL" sz="1500" dirty="0"/>
+              <a:t> met JWT</a:t>
+            </a:r>
+          </a:p>
+          <a:p>
+            <a:r>
+              <a:rPr lang="nl-NL" sz="1500" dirty="0"/>
+              <a:t>games-</a:t>
+            </a:r>
+            <a:r>
+              <a:rPr lang="nl-NL" sz="1500" dirty="0" err="1"/>
+              <a:t>service.js</a:t>
+            </a:r>
+            <a:r>
+              <a:rPr lang="nl-NL" sz="1500" dirty="0"/>
+              <a:t> → GET /restservices/games + GET/DELETE /restservices/games/{</a:t>
+            </a:r>
+            <a:r>
+              <a:rPr lang="nl-NL" sz="1500" dirty="0" err="1"/>
+              <a:t>gameId</a:t>
+            </a:r>
+            <a:r>
+              <a:rPr lang="nl-NL" sz="1500" dirty="0"/>
+              <a:t>} met JWT</a:t>
+            </a:r>
+          </a:p>
+        </p:txBody>
+      </p:sp>
+      <p:sp>
+        <p:nvSpPr>
+          <p:cNvPr id="5" name="Tekstvak 4">
+            <a:extLst>
+              <a:ext uri="{FF2B5EF4-FFF2-40B4-BE49-F238E27FC236}">
+                <a16:creationId xmlns:a16="http://schemas.microsoft.com/office/drawing/2014/main" id="{303A52F5-9753-86B7-475E-550B62A87605}"/>
+              </a:ext>
+            </a:extLst>
+          </p:cNvPr>
+          <p:cNvSpPr txBox="1"/>
+          <p:nvPr/>
+        </p:nvSpPr>
+        <p:spPr>
+          <a:xfrm>
+            <a:off x="1160481" y="3469341"/>
+            <a:ext cx="10150738" cy="3323987"/>
+          </a:xfrm>
+          <a:prstGeom prst="rect">
+            <a:avLst/>
+          </a:prstGeom>
+          <a:noFill/>
+        </p:spPr>
+        <p:txBody>
+          <a:bodyPr wrap="square">
+            <a:spAutoFit/>
+          </a:bodyPr>
+          <a:lstStyle/>
+          <a:p>
+            <a:r>
+              <a:rPr lang="nl-NL" sz="1500" dirty="0"/>
+              <a:t>Voor de koppeling tussen mijn </a:t>
+            </a:r>
+            <a:r>
+              <a:rPr lang="nl-NL" sz="1500" dirty="0" err="1"/>
+              <a:t>frontend</a:t>
+            </a:r>
+            <a:r>
+              <a:rPr lang="nl-NL" sz="1500" dirty="0"/>
+              <a:t> en backend gebruik ik aparte </a:t>
+            </a:r>
+            <a:r>
+              <a:rPr lang="nl-NL" sz="1500" dirty="0" err="1"/>
+              <a:t>JavaScript</a:t>
+            </a:r>
+            <a:r>
+              <a:rPr lang="nl-NL" sz="1500" dirty="0"/>
+              <a:t> service classes. Dit was al deels voorgekauwd door de template van de docenten. De </a:t>
+            </a:r>
+            <a:r>
+              <a:rPr lang="nl-NL" sz="1500" dirty="0" err="1"/>
+              <a:t>frontend</a:t>
+            </a:r>
+            <a:r>
+              <a:rPr lang="nl-NL" sz="1500" dirty="0"/>
+              <a:t> roept de REST </a:t>
+            </a:r>
+            <a:r>
+              <a:rPr lang="nl-NL" sz="1500" dirty="0" err="1"/>
+              <a:t>endpoints</a:t>
+            </a:r>
+            <a:r>
+              <a:rPr lang="nl-NL" sz="1500" dirty="0"/>
+              <a:t> niet direct overal aan, maar doet dit via login-</a:t>
+            </a:r>
+            <a:r>
+              <a:rPr lang="nl-NL" sz="1500" dirty="0" err="1"/>
+              <a:t>service.js</a:t>
+            </a:r>
+            <a:r>
+              <a:rPr lang="nl-NL" sz="1500" dirty="0"/>
+              <a:t>, </a:t>
+            </a:r>
+            <a:r>
+              <a:rPr lang="nl-NL" sz="1500" dirty="0" err="1"/>
+              <a:t>snake-service.js</a:t>
+            </a:r>
+            <a:r>
+              <a:rPr lang="nl-NL" sz="1500" dirty="0"/>
+              <a:t> en games-</a:t>
+            </a:r>
+            <a:r>
+              <a:rPr lang="nl-NL" sz="1500" dirty="0" err="1"/>
+              <a:t>service.js</a:t>
+            </a:r>
+            <a:r>
+              <a:rPr lang="nl-NL" sz="1500" dirty="0"/>
+              <a:t>.</a:t>
+            </a:r>
+            <a:br>
+              <a:rPr lang="nl-NL" sz="1500" dirty="0"/>
+            </a:br>
+            <a:br>
+              <a:rPr lang="nl-NL" sz="1500" dirty="0"/>
+            </a:br>
+            <a:r>
+              <a:rPr lang="nl-NL" sz="1500" dirty="0"/>
+              <a:t>login-</a:t>
+            </a:r>
+            <a:r>
+              <a:rPr lang="nl-NL" sz="1500" dirty="0" err="1"/>
+              <a:t>service.js</a:t>
+            </a:r>
+            <a:r>
+              <a:rPr lang="nl-NL" sz="1500" dirty="0"/>
+              <a:t> handelt het inloggen af via POST /restservices/</a:t>
+            </a:r>
+            <a:r>
+              <a:rPr lang="nl-NL" sz="1500" dirty="0" err="1"/>
+              <a:t>authentication</a:t>
+            </a:r>
+            <a:r>
+              <a:rPr lang="nl-NL" sz="1500" dirty="0"/>
+              <a:t> en bewaart de JWT in </a:t>
+            </a:r>
+            <a:r>
+              <a:rPr lang="nl-NL" sz="1500" dirty="0" err="1"/>
+              <a:t>sessionStorage</a:t>
+            </a:r>
+            <a:r>
+              <a:rPr lang="nl-NL" sz="1500" dirty="0"/>
+              <a:t>.</a:t>
+            </a:r>
+          </a:p>
+          <a:p>
+            <a:r>
+              <a:rPr lang="nl-NL" sz="1500" dirty="0"/>
+              <a:t> </a:t>
+            </a:r>
+            <a:br>
+              <a:rPr lang="nl-NL" sz="1500" dirty="0"/>
+            </a:br>
+            <a:r>
+              <a:rPr lang="nl-NL" sz="1500" dirty="0" err="1"/>
+              <a:t>snake-service.js</a:t>
+            </a:r>
+            <a:r>
+              <a:rPr lang="nl-NL" sz="1500" dirty="0"/>
+              <a:t> haalt de </a:t>
+            </a:r>
+            <a:r>
+              <a:rPr lang="nl-NL" sz="1500" dirty="0" err="1"/>
+              <a:t>snake</a:t>
+            </a:r>
+            <a:r>
+              <a:rPr lang="nl-NL" sz="1500" dirty="0"/>
+              <a:t> metadata op via GET /restservices/</a:t>
+            </a:r>
+            <a:r>
+              <a:rPr lang="nl-NL" sz="1500" dirty="0" err="1"/>
+              <a:t>snake</a:t>
+            </a:r>
+            <a:r>
+              <a:rPr lang="nl-NL" sz="1500" dirty="0"/>
+              <a:t> en past de metadata aan via PATCH /restservices/</a:t>
+            </a:r>
+            <a:r>
+              <a:rPr lang="nl-NL" sz="1500" dirty="0" err="1"/>
+              <a:t>snake</a:t>
+            </a:r>
+            <a:r>
+              <a:rPr lang="nl-NL" sz="1500" dirty="0"/>
+              <a:t> met een </a:t>
+            </a:r>
+            <a:r>
+              <a:rPr lang="nl-NL" sz="1500" dirty="0" err="1"/>
+              <a:t>Authorization</a:t>
+            </a:r>
+            <a:r>
+              <a:rPr lang="nl-NL" sz="1500" dirty="0"/>
+              <a:t> </a:t>
+            </a:r>
+            <a:r>
+              <a:rPr lang="nl-NL" sz="1500" dirty="0" err="1"/>
+              <a:t>Bearer</a:t>
+            </a:r>
+            <a:r>
+              <a:rPr lang="nl-NL" sz="1500" dirty="0"/>
+              <a:t> token.</a:t>
+            </a:r>
+          </a:p>
+          <a:p>
+            <a:br>
+              <a:rPr lang="nl-NL" sz="1500" dirty="0"/>
+            </a:br>
+            <a:r>
+              <a:rPr lang="nl-NL" sz="1500" dirty="0"/>
+              <a:t>games-</a:t>
+            </a:r>
+            <a:r>
+              <a:rPr lang="nl-NL" sz="1500" dirty="0" err="1"/>
+              <a:t>service.js</a:t>
+            </a:r>
+            <a:r>
+              <a:rPr lang="nl-NL" sz="1500" dirty="0"/>
+              <a:t> haalt gespeelde games op via GET /restservices/games, toont details via GET /restservices/games/{</a:t>
+            </a:r>
+            <a:r>
+              <a:rPr lang="nl-NL" sz="1500" dirty="0" err="1"/>
+              <a:t>gameId</a:t>
+            </a:r>
+            <a:r>
+              <a:rPr lang="nl-NL" sz="1500" dirty="0"/>
+              <a:t>} en verwijdert games via DELETE /restservices/games/{</a:t>
+            </a:r>
+            <a:r>
+              <a:rPr lang="nl-NL" sz="1500" dirty="0" err="1"/>
+              <a:t>gameId</a:t>
+            </a:r>
+            <a:r>
+              <a:rPr lang="nl-NL" sz="1500" dirty="0"/>
+              <a:t>}.</a:t>
+            </a:r>
+            <a:br>
+              <a:rPr lang="nl-NL" sz="1500" dirty="0"/>
+            </a:br>
+            <a:br>
+              <a:rPr lang="nl-NL" sz="1500" dirty="0"/>
+            </a:br>
+            <a:r>
+              <a:rPr lang="nl-NL" sz="1500" dirty="0"/>
+              <a:t>Hiermee is de FEP-BEP koppeling gescheiden in service classes en gebruikt de </a:t>
+            </a:r>
+            <a:r>
+              <a:rPr lang="nl-NL" sz="1500" dirty="0" err="1"/>
+              <a:t>frontend</a:t>
+            </a:r>
+            <a:r>
+              <a:rPr lang="nl-NL" sz="1500" dirty="0"/>
+              <a:t> de REST API van backend op een manier waarmee ik het kan hergebruiken.</a:t>
+            </a:r>
           </a:p>
         </p:txBody>
       </p:sp>
@@ -6326,7 +8240,48 @@
           <a:bodyPr/>
           <a:lstStyle/>
           <a:p>
-            <a:endParaRPr lang="nl-NL"/>
+            <a:r>
+              <a:rPr lang="nl-NL" dirty="0"/>
+              <a:t>Bruno login </a:t>
+            </a:r>
+            <a:r>
+              <a:rPr lang="nl-NL" dirty="0" err="1"/>
+              <a:t>Render</a:t>
+            </a:r>
+            <a:endParaRPr lang="nl-NL" dirty="0"/>
+          </a:p>
+          <a:p>
+            <a:r>
+              <a:rPr lang="nl-NL" dirty="0"/>
+              <a:t>Probeer Patch zonder JWT</a:t>
+            </a:r>
+          </a:p>
+          <a:p>
+            <a:r>
+              <a:rPr lang="nl-NL" dirty="0"/>
+              <a:t>JWT copy</a:t>
+            </a:r>
+          </a:p>
+          <a:p>
+            <a:r>
+              <a:rPr lang="nl-NL" dirty="0"/>
+              <a:t>JWT -&gt; PATCH slang</a:t>
+            </a:r>
+          </a:p>
+          <a:p>
+            <a:r>
+              <a:rPr lang="nl-NL" dirty="0" err="1"/>
+              <a:t>Refresh</a:t>
+            </a:r>
+            <a:r>
+              <a:rPr lang="nl-NL" dirty="0"/>
+              <a:t> </a:t>
+            </a:r>
+            <a:r>
+              <a:rPr lang="nl-NL" dirty="0" err="1"/>
+              <a:t>Render</a:t>
+            </a:r>
+            <a:endParaRPr lang="nl-NL" dirty="0"/>
           </a:p>
         </p:txBody>
       </p:sp>

--- a/Presentatie1.pptx
+++ b/Presentatie1.pptx
@@ -5,7 +5,7 @@
     <p:sldMasterId id="2147483648" r:id="rId1"/>
   </p:sldMasterIdLst>
   <p:notesMasterIdLst>
-    <p:notesMasterId r:id="rId17"/>
+    <p:notesMasterId r:id="rId16"/>
   </p:notesMasterIdLst>
   <p:sldIdLst>
     <p:sldId id="256" r:id="rId2"/>
@@ -13,16 +13,15 @@
     <p:sldId id="258" r:id="rId4"/>
     <p:sldId id="259" r:id="rId5"/>
     <p:sldId id="260" r:id="rId6"/>
-    <p:sldId id="261" r:id="rId7"/>
-    <p:sldId id="262" r:id="rId8"/>
-    <p:sldId id="263" r:id="rId9"/>
-    <p:sldId id="267" r:id="rId10"/>
-    <p:sldId id="268" r:id="rId11"/>
-    <p:sldId id="269" r:id="rId12"/>
-    <p:sldId id="270" r:id="rId13"/>
-    <p:sldId id="264" r:id="rId14"/>
-    <p:sldId id="265" r:id="rId15"/>
-    <p:sldId id="266" r:id="rId16"/>
+    <p:sldId id="262" r:id="rId7"/>
+    <p:sldId id="263" r:id="rId8"/>
+    <p:sldId id="267" r:id="rId9"/>
+    <p:sldId id="268" r:id="rId10"/>
+    <p:sldId id="269" r:id="rId11"/>
+    <p:sldId id="270" r:id="rId12"/>
+    <p:sldId id="264" r:id="rId13"/>
+    <p:sldId id="265" r:id="rId14"/>
+    <p:sldId id="266" r:id="rId15"/>
   </p:sldIdLst>
   <p:sldSz cx="12192000" cy="6858000"/>
   <p:notesSz cx="6858000" cy="9144000"/>
@@ -538,7 +537,7 @@
           <a:p>
             <a:fld id="{F1532ED0-5AAD-3941-964B-0FD5D489EE9B}" type="slidenum">
               <a:rPr lang="nl-NL" smtClean="0"/>
-              <a:t>15</a:t>
+              <a:t>14</a:t>
             </a:fld>
             <a:endParaRPr lang="nl-NL"/>
           </a:p>
@@ -4974,7 +4973,12 @@
             <p:ph type="ctrTitle"/>
           </p:nvPr>
         </p:nvSpPr>
-        <p:spPr/>
+        <p:spPr>
+          <a:xfrm>
+            <a:off x="2611808" y="2772782"/>
+            <a:ext cx="5518066" cy="2268559"/>
+          </a:xfrm>
+        </p:spPr>
         <p:txBody>
           <a:bodyPr/>
           <a:lstStyle/>
@@ -5005,17 +5009,25 @@
         </p:nvSpPr>
         <p:spPr>
           <a:xfrm>
-            <a:off x="3514552" y="3403064"/>
-            <a:ext cx="5357600" cy="1160213"/>
+            <a:off x="2611808" y="2689412"/>
+            <a:ext cx="6260344" cy="1873865"/>
           </a:xfrm>
         </p:spPr>
         <p:txBody>
-          <a:bodyPr/>
+          <a:bodyPr>
+            <a:normAutofit/>
+          </a:bodyPr>
           <a:lstStyle/>
           <a:p>
             <a:r>
               <a:rPr lang="nl-NL" dirty="0"/>
               <a:t>Door Leroy Andrade</a:t>
+            </a:r>
+          </a:p>
+          <a:p>
+            <a:r>
+              <a:rPr lang="nl-NL" dirty="0"/>
+              <a:t>Studentnummer: 1867337</a:t>
             </a:r>
           </a:p>
         </p:txBody>
@@ -5055,7 +5067,7 @@
           <p:cNvPr id="2" name="Titel 1">
             <a:extLst>
               <a:ext uri="{FF2B5EF4-FFF2-40B4-BE49-F238E27FC236}">
-                <a16:creationId xmlns:a16="http://schemas.microsoft.com/office/drawing/2014/main" id="{5175050D-495A-F2EF-C8F3-43322658716F}"/>
+                <a16:creationId xmlns:a16="http://schemas.microsoft.com/office/drawing/2014/main" id="{B2A65742-12B6-E258-7657-082BD8CCA682}"/>
               </a:ext>
             </a:extLst>
           </p:cNvPr>
@@ -5074,7 +5086,7 @@
             <a:pPr algn="ctr"/>
             <a:r>
               <a:rPr lang="nl-NL" dirty="0"/>
-              <a:t>Informatie van gespeelde potjes</a:t>
+              <a:t>Deleten van informatie spel</a:t>
             </a:r>
           </a:p>
         </p:txBody>
@@ -5084,7 +5096,7 @@
           <p:cNvPr id="3" name="Tijdelijke aanduiding voor inhoud 2">
             <a:extLst>
               <a:ext uri="{FF2B5EF4-FFF2-40B4-BE49-F238E27FC236}">
-                <a16:creationId xmlns:a16="http://schemas.microsoft.com/office/drawing/2014/main" id="{899D5CE8-F47D-B31B-020F-E8A889A578F4}"/>
+                <a16:creationId xmlns:a16="http://schemas.microsoft.com/office/drawing/2014/main" id="{9095DA51-1AA4-6515-5929-B98172B94AF1}"/>
               </a:ext>
             </a:extLst>
           </p:cNvPr>
@@ -5095,40 +5107,25 @@
             <p:ph idx="1"/>
           </p:nvPr>
         </p:nvSpPr>
-        <p:spPr/>
+        <p:spPr>
+          <a:xfrm>
+            <a:off x="2913449" y="2118528"/>
+            <a:ext cx="7796540" cy="2620944"/>
+          </a:xfrm>
+        </p:spPr>
         <p:txBody>
           <a:bodyPr/>
           <a:lstStyle/>
           <a:p>
             <a:r>
               <a:rPr lang="nl-NL" dirty="0"/>
-              <a:t>Online: </a:t>
-            </a:r>
-            <a:r>
-              <a:rPr lang="nl-NL" dirty="0">
-                <a:hlinkClick r:id="rId2"/>
-              </a:rPr>
-              <a:t>https://battlesnake-nm77.onrender.com/games/games.html</a:t>
-            </a:r>
-            <a:endParaRPr lang="nl-NL" dirty="0"/>
-          </a:p>
-          <a:p>
-            <a:endParaRPr lang="nl-NL" dirty="0"/>
-          </a:p>
-          <a:p>
-            <a:r>
-              <a:rPr lang="nl-NL" dirty="0"/>
-              <a:t>Lokaal: </a:t>
-            </a:r>
-            <a:r>
-              <a:rPr lang="nl-NL" dirty="0">
-                <a:hlinkClick r:id="rId3"/>
-              </a:rPr>
-              <a:t>http://localhost:8082/games/games.html</a:t>
-            </a:r>
-            <a:r>
-              <a:rPr lang="nl-NL" dirty="0"/>
-              <a:t> </a:t>
+              <a:t>Open Bruno:</a:t>
+            </a:r>
+          </a:p>
+          <a:p>
+            <a:r>
+              <a:rPr lang="nl-NL" dirty="0"/>
+              <a:t>Start, move, end -&gt; delete</a:t>
             </a:r>
           </a:p>
         </p:txBody>
@@ -5136,7 +5133,7 @@
     </p:spTree>
     <p:extLst>
       <p:ext uri="{BB962C8B-B14F-4D97-AF65-F5344CB8AC3E}">
-        <p14:creationId xmlns:p14="http://schemas.microsoft.com/office/powerpoint/2010/main" val="1915665410"/>
+        <p14:creationId xmlns:p14="http://schemas.microsoft.com/office/powerpoint/2010/main" val="3301497044"/>
       </p:ext>
     </p:extLst>
   </p:cSld>
@@ -5168,7 +5165,7 @@
           <p:cNvPr id="2" name="Titel 1">
             <a:extLst>
               <a:ext uri="{FF2B5EF4-FFF2-40B4-BE49-F238E27FC236}">
-                <a16:creationId xmlns:a16="http://schemas.microsoft.com/office/drawing/2014/main" id="{B2A65742-12B6-E258-7657-082BD8CCA682}"/>
+                <a16:creationId xmlns:a16="http://schemas.microsoft.com/office/drawing/2014/main" id="{FFB58FE4-90E8-1249-BCF7-A089D3D79CA6}"/>
               </a:ext>
             </a:extLst>
           </p:cNvPr>
@@ -5187,7 +5184,7 @@
             <a:pPr algn="ctr"/>
             <a:r>
               <a:rPr lang="nl-NL" dirty="0"/>
-              <a:t>Deleten van informatie spel</a:t>
+              <a:t>Login</a:t>
             </a:r>
           </a:p>
         </p:txBody>
@@ -5197,7 +5194,7 @@
           <p:cNvPr id="3" name="Tijdelijke aanduiding voor inhoud 2">
             <a:extLst>
               <a:ext uri="{FF2B5EF4-FFF2-40B4-BE49-F238E27FC236}">
-                <a16:creationId xmlns:a16="http://schemas.microsoft.com/office/drawing/2014/main" id="{9095DA51-1AA4-6515-5929-B98172B94AF1}"/>
+                <a16:creationId xmlns:a16="http://schemas.microsoft.com/office/drawing/2014/main" id="{7994DFAA-983A-06C2-23C2-0EFB4BDDF281}"/>
               </a:ext>
             </a:extLst>
           </p:cNvPr>
@@ -5215,13 +5212,63 @@
           <a:p>
             <a:r>
               <a:rPr lang="nl-NL" dirty="0"/>
-              <a:t>Bruno:</a:t>
-            </a:r>
-          </a:p>
-          <a:p>
-            <a:r>
-              <a:rPr lang="nl-NL" dirty="0"/>
-              <a:t>Start, move, end -&gt; delete</a:t>
+              <a:t>import </a:t>
+            </a:r>
+            <a:r>
+              <a:rPr lang="nl-NL" dirty="0" err="1"/>
+              <a:t>javax.annotation.security.RolesAllowed</a:t>
+            </a:r>
+            <a:r>
+              <a:rPr lang="nl-NL" dirty="0"/>
+              <a:t>;</a:t>
+            </a:r>
+          </a:p>
+          <a:p>
+            <a:r>
+              <a:rPr lang="nl-NL" dirty="0" err="1"/>
+              <a:t>SnakeResource.java</a:t>
+            </a:r>
+            <a:endParaRPr lang="nl-NL" dirty="0"/>
+          </a:p>
+          <a:p>
+            <a:r>
+              <a:rPr lang="nl-NL" dirty="0"/>
+              <a:t>@</a:t>
+            </a:r>
+            <a:r>
+              <a:rPr lang="nl-NL" dirty="0" err="1"/>
+              <a:t>RolesAllowed</a:t>
+            </a:r>
+            <a:r>
+              <a:rPr lang="nl-NL" dirty="0"/>
+              <a:t>({"user", "</a:t>
+            </a:r>
+            <a:r>
+              <a:rPr lang="nl-NL" dirty="0" err="1"/>
+              <a:t>admin</a:t>
+            </a:r>
+            <a:r>
+              <a:rPr lang="nl-NL" dirty="0"/>
+              <a:t>"})</a:t>
+            </a:r>
+          </a:p>
+          <a:p>
+            <a:r>
+              <a:rPr lang="nl-NL" dirty="0" err="1"/>
+              <a:t>GamesResource.java</a:t>
+            </a:r>
+            <a:endParaRPr lang="nl-NL" dirty="0"/>
+          </a:p>
+          <a:p>
+            <a:endParaRPr lang="nl-NL" dirty="0"/>
+          </a:p>
+          <a:p>
+            <a:pPr marL="457200" lvl="1" indent="0">
+              <a:buNone/>
+            </a:pPr>
+            <a:r>
+              <a:rPr lang="nl-NL" dirty="0"/>
+              <a:t>Demo Bruno met delete</a:t>
             </a:r>
           </a:p>
         </p:txBody>
@@ -5229,7 +5276,7 @@
     </p:spTree>
     <p:extLst>
       <p:ext uri="{BB962C8B-B14F-4D97-AF65-F5344CB8AC3E}">
-        <p14:creationId xmlns:p14="http://schemas.microsoft.com/office/powerpoint/2010/main" val="3301497044"/>
+        <p14:creationId xmlns:p14="http://schemas.microsoft.com/office/powerpoint/2010/main" val="3796976134"/>
       </p:ext>
     </p:extLst>
   </p:cSld>
@@ -5261,7 +5308,7 @@
           <p:cNvPr id="2" name="Titel 1">
             <a:extLst>
               <a:ext uri="{FF2B5EF4-FFF2-40B4-BE49-F238E27FC236}">
-                <a16:creationId xmlns:a16="http://schemas.microsoft.com/office/drawing/2014/main" id="{FFB58FE4-90E8-1249-BCF7-A089D3D79CA6}"/>
+                <a16:creationId xmlns:a16="http://schemas.microsoft.com/office/drawing/2014/main" id="{CFE3AA31-F56F-F280-A8E7-19B16F7F5F60}"/>
               </a:ext>
             </a:extLst>
           </p:cNvPr>
@@ -5280,7 +5327,7 @@
             <a:pPr algn="ctr"/>
             <a:r>
               <a:rPr lang="nl-NL" dirty="0"/>
-              <a:t>Login</a:t>
+              <a:t>Security</a:t>
             </a:r>
           </a:p>
         </p:txBody>
@@ -5290,7 +5337,7 @@
           <p:cNvPr id="3" name="Tijdelijke aanduiding voor inhoud 2">
             <a:extLst>
               <a:ext uri="{FF2B5EF4-FFF2-40B4-BE49-F238E27FC236}">
-                <a16:creationId xmlns:a16="http://schemas.microsoft.com/office/drawing/2014/main" id="{7994DFAA-983A-06C2-23C2-0EFB4BDDF281}"/>
+                <a16:creationId xmlns:a16="http://schemas.microsoft.com/office/drawing/2014/main" id="{03E70E61-49F2-2C57-3033-2AC05A1C6BA3}"/>
               </a:ext>
             </a:extLst>
           </p:cNvPr>
@@ -5307,26 +5354,154 @@
           <a:lstStyle/>
           <a:p>
             <a:r>
-              <a:rPr lang="nl-NL" dirty="0"/>
-              <a:t>import </a:t>
+              <a:rPr lang="nl-NL" b="1" dirty="0"/>
+              <a:t>Login </a:t>
+            </a:r>
+            <a:r>
+              <a:rPr lang="nl-NL" b="1" dirty="0" err="1"/>
+              <a:t>endpoint</a:t>
+            </a:r>
+            <a:r>
+              <a:rPr lang="nl-NL" b="1" dirty="0"/>
+              <a:t>: </a:t>
+            </a:r>
+            <a:r>
+              <a:rPr lang="nl-NL" dirty="0"/>
+              <a:t>POST /restservices/</a:t>
             </a:r>
             <a:r>
               <a:rPr lang="nl-NL" dirty="0" err="1"/>
-              <a:t>javax.annotation.security.RolesAllowed</a:t>
-            </a:r>
-            <a:r>
-              <a:rPr lang="nl-NL" dirty="0"/>
-              <a:t>;</a:t>
-            </a:r>
-          </a:p>
-          <a:p>
+              <a:t>authentication</a:t>
+            </a:r>
+            <a:endParaRPr lang="nl-NL" dirty="0"/>
+          </a:p>
+          <a:p>
+            <a:r>
+              <a:rPr lang="nl-NL" b="1" dirty="0"/>
+              <a:t>JWT bevat </a:t>
+            </a:r>
+            <a:r>
+              <a:rPr lang="nl-NL" b="1" dirty="0" err="1"/>
+              <a:t>role</a:t>
+            </a:r>
+            <a:r>
+              <a:rPr lang="nl-NL" b="1" dirty="0"/>
+              <a:t>: </a:t>
+            </a:r>
+            <a:r>
+              <a:rPr lang="nl-NL" dirty="0"/>
+              <a:t>In de token stop ik: .claim("</a:t>
+            </a:r>
             <a:r>
               <a:rPr lang="nl-NL" dirty="0" err="1"/>
-              <a:t>SnakeResource.java</a:t>
-            </a:r>
-            <a:endParaRPr lang="nl-NL" dirty="0"/>
-          </a:p>
-          <a:p>
+              <a:t>role</a:t>
+            </a:r>
+            <a:r>
+              <a:rPr lang="nl-NL" dirty="0"/>
+              <a:t>", </a:t>
+            </a:r>
+            <a:r>
+              <a:rPr lang="nl-NL" dirty="0" err="1"/>
+              <a:t>role</a:t>
+            </a:r>
+            <a:r>
+              <a:rPr lang="nl-NL" dirty="0"/>
+              <a:t>)</a:t>
+            </a:r>
+          </a:p>
+          <a:p>
+            <a:r>
+              <a:rPr lang="nl-NL" b="1" dirty="0"/>
+              <a:t>Beveiligde </a:t>
+            </a:r>
+            <a:r>
+              <a:rPr lang="nl-NL" b="1" dirty="0" err="1"/>
+              <a:t>endpoints</a:t>
+            </a:r>
+            <a:r>
+              <a:rPr lang="nl-NL" b="1" dirty="0"/>
+              <a:t> met </a:t>
+            </a:r>
+            <a:r>
+              <a:rPr lang="nl-NL" b="1" dirty="0" err="1"/>
+              <a:t>roles</a:t>
+            </a:r>
+            <a:br>
+              <a:rPr lang="nl-NL" dirty="0"/>
+            </a:br>
+            <a:r>
+              <a:rPr lang="nl-NL" dirty="0"/>
+              <a:t>Bijvoorbeeld: PATCH /</a:t>
+            </a:r>
+            <a:r>
+              <a:rPr lang="nl-NL" dirty="0" err="1"/>
+              <a:t>snake</a:t>
+            </a:r>
+            <a:r>
+              <a:rPr lang="nl-NL" dirty="0"/>
+              <a:t> mag alleen met: </a:t>
+            </a:r>
+            <a:r>
+              <a:rPr lang="nl-NL" sz="1200" dirty="0"/>
+              <a:t>@</a:t>
+            </a:r>
+            <a:r>
+              <a:rPr lang="nl-NL" sz="1200" dirty="0" err="1"/>
+              <a:t>RolesAllowed</a:t>
+            </a:r>
+            <a:r>
+              <a:rPr lang="nl-NL" sz="1200" dirty="0"/>
+              <a:t>({"user", "</a:t>
+            </a:r>
+            <a:r>
+              <a:rPr lang="nl-NL" sz="1200" dirty="0" err="1"/>
+              <a:t>admin</a:t>
+            </a:r>
+            <a:r>
+              <a:rPr lang="nl-NL" sz="1200" dirty="0"/>
+              <a:t>"})</a:t>
+            </a:r>
+          </a:p>
+          <a:p>
+            <a:r>
+              <a:rPr lang="nl-NL" b="1" dirty="0"/>
+              <a:t>Games beveiligen</a:t>
+            </a:r>
+            <a:br>
+              <a:rPr lang="nl-NL" sz="1200" dirty="0"/>
+            </a:br>
+            <a:r>
+              <a:rPr lang="nl-NL" dirty="0"/>
+              <a:t>GET /games/{</a:t>
+            </a:r>
+            <a:r>
+              <a:rPr lang="nl-NL" dirty="0" err="1"/>
+              <a:t>gameId</a:t>
+            </a:r>
+            <a:r>
+              <a:rPr lang="nl-NL" dirty="0"/>
+              <a:t>}</a:t>
+            </a:r>
+            <a:r>
+              <a:rPr lang="nl-NL" sz="1200" dirty="0"/>
+              <a:t> en </a:t>
+            </a:r>
+            <a:r>
+              <a:rPr lang="nl-NL" dirty="0"/>
+              <a:t>DELETE /games/{</a:t>
+            </a:r>
+            <a:r>
+              <a:rPr lang="nl-NL" dirty="0" err="1"/>
+              <a:t>gameId</a:t>
+            </a:r>
+            <a:r>
+              <a:rPr lang="nl-NL" dirty="0"/>
+              <a:t>}</a:t>
+            </a:r>
+            <a:r>
+              <a:rPr lang="nl-NL" sz="1200" dirty="0"/>
+              <a:t> zijn ook beveiligd met </a:t>
+            </a:r>
             <a:r>
               <a:rPr lang="nl-NL" dirty="0"/>
               <a:t>@</a:t>
@@ -5347,12 +5522,12 @@
               <a:rPr lang="nl-NL" dirty="0"/>
               <a:t>"})</a:t>
             </a:r>
-          </a:p>
-          <a:p>
-            <a:r>
-              <a:rPr lang="nl-NL" dirty="0" err="1"/>
-              <a:t>GamesResource.java</a:t>
-            </a:r>
+            <a:r>
+              <a:rPr lang="nl-NL" sz="1200" dirty="0"/>
+              <a:t>. </a:t>
+            </a:r>
+          </a:p>
+          <a:p>
             <a:endParaRPr lang="nl-NL" dirty="0"/>
           </a:p>
         </p:txBody>
@@ -5360,7 +5535,7 @@
     </p:spTree>
     <p:extLst>
       <p:ext uri="{BB962C8B-B14F-4D97-AF65-F5344CB8AC3E}">
-        <p14:creationId xmlns:p14="http://schemas.microsoft.com/office/powerpoint/2010/main" val="3796976134"/>
+        <p14:creationId xmlns:p14="http://schemas.microsoft.com/office/powerpoint/2010/main" val="1241084281"/>
       </p:ext>
     </p:extLst>
   </p:cSld>
@@ -5392,7 +5567,7 @@
           <p:cNvPr id="2" name="Titel 1">
             <a:extLst>
               <a:ext uri="{FF2B5EF4-FFF2-40B4-BE49-F238E27FC236}">
-                <a16:creationId xmlns:a16="http://schemas.microsoft.com/office/drawing/2014/main" id="{CFE3AA31-F56F-F280-A8E7-19B16F7F5F60}"/>
+                <a16:creationId xmlns:a16="http://schemas.microsoft.com/office/drawing/2014/main" id="{A327BE19-1DAD-429A-AE09-1E6DB5443CF5}"/>
               </a:ext>
             </a:extLst>
           </p:cNvPr>
@@ -5411,7 +5586,7 @@
             <a:pPr algn="ctr"/>
             <a:r>
               <a:rPr lang="nl-NL" dirty="0"/>
-              <a:t>Security</a:t>
+              <a:t>Testen </a:t>
             </a:r>
           </a:p>
         </p:txBody>
@@ -5421,7 +5596,7 @@
           <p:cNvPr id="3" name="Tijdelijke aanduiding voor inhoud 2">
             <a:extLst>
               <a:ext uri="{FF2B5EF4-FFF2-40B4-BE49-F238E27FC236}">
-                <a16:creationId xmlns:a16="http://schemas.microsoft.com/office/drawing/2014/main" id="{03E70E61-49F2-2C57-3033-2AC05A1C6BA3}"/>
+                <a16:creationId xmlns:a16="http://schemas.microsoft.com/office/drawing/2014/main" id="{04586637-434A-2425-22BF-E407144FEDB9}"/>
               </a:ext>
             </a:extLst>
           </p:cNvPr>
@@ -5438,188 +5613,75 @@
           <a:lstStyle/>
           <a:p>
             <a:r>
-              <a:rPr lang="nl-NL" b="1" dirty="0"/>
-              <a:t>Login </a:t>
-            </a:r>
-            <a:r>
-              <a:rPr lang="nl-NL" b="1" dirty="0" err="1"/>
-              <a:t>endpoint</a:t>
-            </a:r>
-            <a:r>
-              <a:rPr lang="nl-NL" b="1" dirty="0"/>
-              <a:t>: </a:t>
-            </a:r>
-            <a:r>
-              <a:rPr lang="nl-NL" dirty="0"/>
-              <a:t>POST /restservices/</a:t>
+              <a:rPr lang="nl-NL" dirty="0"/>
+              <a:t>Ik test of </a:t>
             </a:r>
             <a:r>
               <a:rPr lang="nl-NL" dirty="0" err="1"/>
-              <a:t>authentication</a:t>
-            </a:r>
-            <a:endParaRPr lang="nl-NL" dirty="0"/>
-          </a:p>
-          <a:p>
-            <a:r>
-              <a:rPr lang="nl-NL" b="1" dirty="0"/>
-              <a:t>JWT bevat </a:t>
-            </a:r>
-            <a:r>
-              <a:rPr lang="nl-NL" b="1" dirty="0" err="1"/>
-              <a:t>role</a:t>
-            </a:r>
-            <a:r>
-              <a:rPr lang="nl-NL" b="1" dirty="0"/>
-              <a:t>: </a:t>
-            </a:r>
-            <a:r>
-              <a:rPr lang="nl-NL" dirty="0"/>
-              <a:t>In de token stop ik: .claim("</a:t>
+              <a:t>Game.chooseMove</a:t>
+            </a:r>
+            <a:r>
+              <a:rPr lang="nl-NL" dirty="0"/>
+              <a:t>(</a:t>
             </a:r>
             <a:r>
               <a:rPr lang="nl-NL" dirty="0" err="1"/>
-              <a:t>role</a:t>
-            </a:r>
-            <a:r>
-              <a:rPr lang="nl-NL" dirty="0"/>
-              <a:t>", </a:t>
+              <a:t>foo</a:t>
+            </a:r>
+            <a:r>
+              <a:rPr lang="nl-NL" dirty="0"/>
+              <a:t>) slimme/veilige keuzes maakt.</a:t>
+            </a:r>
+            <a:br>
+              <a:rPr lang="nl-NL" dirty="0"/>
+            </a:br>
+            <a:r>
+              <a:rPr lang="nl-NL" dirty="0"/>
+              <a:t>Ik test hier vooral:</a:t>
+            </a:r>
+            <a:br>
+              <a:rPr lang="nl-NL" dirty="0"/>
+            </a:br>
+            <a:r>
+              <a:rPr lang="nl-NL" dirty="0"/>
+              <a:t>// 1. richting food gaan als dat veilig is</a:t>
+            </a:r>
+            <a:br>
+              <a:rPr lang="nl-NL" dirty="0"/>
+            </a:br>
+            <a:r>
+              <a:rPr lang="nl-NL" dirty="0"/>
+              <a:t>// 2. niet door de muur gaan</a:t>
+            </a:r>
+            <a:br>
+              <a:rPr lang="nl-NL" dirty="0"/>
+            </a:br>
+            <a:r>
+              <a:rPr lang="nl-NL" dirty="0"/>
+              <a:t>// 3. niet tegen mijn eigen body gaan</a:t>
+            </a:r>
+            <a:br>
+              <a:rPr lang="nl-NL" dirty="0"/>
+            </a:br>
+            <a:r>
+              <a:rPr lang="nl-NL" dirty="0"/>
+              <a:t>// 4. niet tegen </a:t>
             </a:r>
             <a:r>
               <a:rPr lang="nl-NL" dirty="0" err="1"/>
-              <a:t>role</a:t>
-            </a:r>
-            <a:r>
-              <a:rPr lang="nl-NL" dirty="0"/>
-              <a:t>)</a:t>
-            </a:r>
-          </a:p>
-          <a:p>
-            <a:r>
-              <a:rPr lang="nl-NL" b="1" dirty="0"/>
-              <a:t>Beveiligde </a:t>
-            </a:r>
-            <a:r>
-              <a:rPr lang="nl-NL" b="1" dirty="0" err="1"/>
-              <a:t>endpoints</a:t>
-            </a:r>
-            <a:r>
-              <a:rPr lang="nl-NL" b="1" dirty="0"/>
-              <a:t> met </a:t>
-            </a:r>
-            <a:r>
-              <a:rPr lang="nl-NL" b="1" dirty="0" err="1"/>
-              <a:t>roles</a:t>
-            </a:r>
-            <a:br>
-              <a:rPr lang="nl-NL" dirty="0"/>
-            </a:br>
-            <a:r>
-              <a:rPr lang="nl-NL" dirty="0"/>
-              <a:t>Bijvoorbeeld: PATCH /</a:t>
-            </a:r>
-            <a:r>
-              <a:rPr lang="nl-NL" dirty="0" err="1"/>
-              <a:t>snake</a:t>
-            </a:r>
-            <a:r>
-              <a:rPr lang="nl-NL" dirty="0"/>
-              <a:t> mag alleen met: </a:t>
-            </a:r>
-            <a:r>
-              <a:rPr lang="nl-NL" sz="1200" dirty="0"/>
-              <a:t>@</a:t>
-            </a:r>
-            <a:r>
-              <a:rPr lang="nl-NL" sz="1200" dirty="0" err="1"/>
-              <a:t>RolesAllowed</a:t>
-            </a:r>
-            <a:r>
-              <a:rPr lang="nl-NL" sz="1200" dirty="0"/>
-              <a:t>({"user", "</a:t>
-            </a:r>
-            <a:r>
-              <a:rPr lang="nl-NL" sz="1200" dirty="0" err="1"/>
-              <a:t>admin</a:t>
-            </a:r>
-            <a:r>
-              <a:rPr lang="nl-NL" sz="1200" dirty="0"/>
-              <a:t>"})</a:t>
-            </a:r>
-          </a:p>
-          <a:p>
-            <a:r>
-              <a:rPr lang="nl-NL" b="1" dirty="0"/>
-              <a:t>Games beveiligen</a:t>
-            </a:r>
-            <a:br>
-              <a:rPr lang="nl-NL" sz="1200" dirty="0"/>
-            </a:br>
-            <a:r>
-              <a:rPr lang="nl-NL" dirty="0"/>
-              <a:t>GET /games/{</a:t>
-            </a:r>
-            <a:r>
-              <a:rPr lang="nl-NL" dirty="0" err="1"/>
-              <a:t>gameId</a:t>
-            </a:r>
-            <a:r>
-              <a:rPr lang="nl-NL" dirty="0"/>
-              <a:t>}</a:t>
-            </a:r>
-            <a:r>
-              <a:rPr lang="nl-NL" sz="1200" dirty="0"/>
-              <a:t> en </a:t>
-            </a:r>
-            <a:r>
-              <a:rPr lang="nl-NL" dirty="0"/>
-              <a:t>DELETE /games/{</a:t>
-            </a:r>
-            <a:r>
-              <a:rPr lang="nl-NL" dirty="0" err="1"/>
-              <a:t>gameId</a:t>
-            </a:r>
-            <a:r>
-              <a:rPr lang="nl-NL" dirty="0"/>
-              <a:t>}</a:t>
-            </a:r>
-            <a:r>
-              <a:rPr lang="nl-NL" sz="1200" dirty="0"/>
-              <a:t> zijn ook beveiligd met </a:t>
-            </a:r>
-            <a:r>
-              <a:rPr lang="nl-NL" dirty="0"/>
-              <a:t>@</a:t>
-            </a:r>
-            <a:r>
-              <a:rPr lang="nl-NL" dirty="0" err="1"/>
-              <a:t>RolesAllowed</a:t>
-            </a:r>
-            <a:r>
-              <a:rPr lang="nl-NL" dirty="0"/>
-              <a:t>({"user", "</a:t>
-            </a:r>
-            <a:r>
-              <a:rPr lang="nl-NL" dirty="0" err="1"/>
-              <a:t>admin</a:t>
-            </a:r>
-            <a:r>
-              <a:rPr lang="nl-NL" dirty="0"/>
-              <a:t>"})</a:t>
-            </a:r>
-            <a:r>
-              <a:rPr lang="nl-NL" sz="1200" dirty="0"/>
-              <a:t>. </a:t>
-            </a:r>
-          </a:p>
-          <a:p>
-            <a:endParaRPr lang="nl-NL" dirty="0"/>
+              <a:t>enemy</a:t>
+            </a:r>
+            <a:r>
+              <a:rPr lang="nl-NL" dirty="0"/>
+              <a:t> body gaan</a:t>
+            </a:r>
           </a:p>
         </p:txBody>
       </p:sp>
     </p:spTree>
     <p:extLst>
       <p:ext uri="{BB962C8B-B14F-4D97-AF65-F5344CB8AC3E}">
-        <p14:creationId xmlns:p14="http://schemas.microsoft.com/office/powerpoint/2010/main" val="1241084281"/>
+        <p14:creationId xmlns:p14="http://schemas.microsoft.com/office/powerpoint/2010/main" val="2484737985"/>
       </p:ext>
     </p:extLst>
   </p:cSld>
@@ -5651,156 +5713,6 @@
           <p:cNvPr id="2" name="Titel 1">
             <a:extLst>
               <a:ext uri="{FF2B5EF4-FFF2-40B4-BE49-F238E27FC236}">
-                <a16:creationId xmlns:a16="http://schemas.microsoft.com/office/drawing/2014/main" id="{A327BE19-1DAD-429A-AE09-1E6DB5443CF5}"/>
-              </a:ext>
-            </a:extLst>
-          </p:cNvPr>
-          <p:cNvSpPr>
-            <a:spLocks noGrp="1"/>
-          </p:cNvSpPr>
-          <p:nvPr>
-            <p:ph type="title"/>
-          </p:nvPr>
-        </p:nvSpPr>
-        <p:spPr/>
-        <p:txBody>
-          <a:bodyPr/>
-          <a:lstStyle/>
-          <a:p>
-            <a:pPr algn="ctr"/>
-            <a:r>
-              <a:rPr lang="nl-NL" dirty="0"/>
-              <a:t>Testen </a:t>
-            </a:r>
-          </a:p>
-        </p:txBody>
-      </p:sp>
-      <p:sp>
-        <p:nvSpPr>
-          <p:cNvPr id="3" name="Tijdelijke aanduiding voor inhoud 2">
-            <a:extLst>
-              <a:ext uri="{FF2B5EF4-FFF2-40B4-BE49-F238E27FC236}">
-                <a16:creationId xmlns:a16="http://schemas.microsoft.com/office/drawing/2014/main" id="{04586637-434A-2425-22BF-E407144FEDB9}"/>
-              </a:ext>
-            </a:extLst>
-          </p:cNvPr>
-          <p:cNvSpPr>
-            <a:spLocks noGrp="1"/>
-          </p:cNvSpPr>
-          <p:nvPr>
-            <p:ph idx="1"/>
-          </p:nvPr>
-        </p:nvSpPr>
-        <p:spPr/>
-        <p:txBody>
-          <a:bodyPr/>
-          <a:lstStyle/>
-          <a:p>
-            <a:r>
-              <a:rPr lang="nl-NL" dirty="0"/>
-              <a:t>Ik test of </a:t>
-            </a:r>
-            <a:r>
-              <a:rPr lang="nl-NL" dirty="0" err="1"/>
-              <a:t>Game.chooseMove</a:t>
-            </a:r>
-            <a:r>
-              <a:rPr lang="nl-NL" dirty="0"/>
-              <a:t>(</a:t>
-            </a:r>
-            <a:r>
-              <a:rPr lang="nl-NL" dirty="0" err="1"/>
-              <a:t>foo</a:t>
-            </a:r>
-            <a:r>
-              <a:rPr lang="nl-NL" dirty="0"/>
-              <a:t>) slimme/veilige keuzes maakt.</a:t>
-            </a:r>
-            <a:br>
-              <a:rPr lang="nl-NL"/>
-            </a:br>
-            <a:r>
-              <a:rPr lang="nl-NL"/>
-              <a:t>Ik </a:t>
-            </a:r>
-            <a:r>
-              <a:rPr lang="nl-NL" dirty="0"/>
-              <a:t>test hier vooral:</a:t>
-            </a:r>
-            <a:br>
-              <a:rPr lang="nl-NL" dirty="0"/>
-            </a:br>
-            <a:r>
-              <a:rPr lang="nl-NL" dirty="0"/>
-              <a:t>// 1. richting food gaan als dat veilig is</a:t>
-            </a:r>
-            <a:br>
-              <a:rPr lang="nl-NL" dirty="0"/>
-            </a:br>
-            <a:r>
-              <a:rPr lang="nl-NL" dirty="0"/>
-              <a:t>// 2. niet door de muur gaan</a:t>
-            </a:r>
-            <a:br>
-              <a:rPr lang="nl-NL" dirty="0"/>
-            </a:br>
-            <a:r>
-              <a:rPr lang="nl-NL" dirty="0"/>
-              <a:t>// 3. niet tegen mijn eigen body gaan</a:t>
-            </a:r>
-            <a:br>
-              <a:rPr lang="nl-NL" dirty="0"/>
-            </a:br>
-            <a:r>
-              <a:rPr lang="nl-NL" dirty="0"/>
-              <a:t>// 4. niet tegen </a:t>
-            </a:r>
-            <a:r>
-              <a:rPr lang="nl-NL" dirty="0" err="1"/>
-              <a:t>enemy</a:t>
-            </a:r>
-            <a:r>
-              <a:rPr lang="nl-NL" dirty="0"/>
-              <a:t> body gaan</a:t>
-            </a:r>
-          </a:p>
-        </p:txBody>
-      </p:sp>
-    </p:spTree>
-    <p:extLst>
-      <p:ext uri="{BB962C8B-B14F-4D97-AF65-F5344CB8AC3E}">
-        <p14:creationId xmlns:p14="http://schemas.microsoft.com/office/powerpoint/2010/main" val="2484737985"/>
-      </p:ext>
-    </p:extLst>
-  </p:cSld>
-  <p:clrMapOvr>
-    <a:masterClrMapping/>
-  </p:clrMapOvr>
-</p:sld>
-</file>
-
-<file path=ppt/slides/slide15.xml><?xml version="1.0" encoding="utf-8"?>
-<p:sld xmlns:a="http://schemas.openxmlformats.org/drawingml/2006/main" xmlns:r="http://schemas.openxmlformats.org/officeDocument/2006/relationships" xmlns:p="http://schemas.openxmlformats.org/presentationml/2006/main">
-  <p:cSld>
-    <p:spTree>
-      <p:nvGrpSpPr>
-        <p:cNvPr id="1" name=""/>
-        <p:cNvGrpSpPr/>
-        <p:nvPr/>
-      </p:nvGrpSpPr>
-      <p:grpSpPr>
-        <a:xfrm>
-          <a:off x="0" y="0"/>
-          <a:ext cx="0" cy="0"/>
-          <a:chOff x="0" y="0"/>
-          <a:chExt cx="0" cy="0"/>
-        </a:xfrm>
-      </p:grpSpPr>
-      <p:sp>
-        <p:nvSpPr>
-          <p:cNvPr id="2" name="Titel 1">
-            <a:extLst>
-              <a:ext uri="{FF2B5EF4-FFF2-40B4-BE49-F238E27FC236}">
                 <a16:creationId xmlns:a16="http://schemas.microsoft.com/office/drawing/2014/main" id="{DFDF1BC6-D8D2-F96E-7700-125F7A4FE58D}"/>
               </a:ext>
             </a:extLst>
@@ -5817,7 +5729,11 @@
           <a:bodyPr/>
           <a:lstStyle/>
           <a:p>
-            <a:endParaRPr lang="nl-NL"/>
+            <a:pPr algn="ctr"/>
+            <a:r>
+              <a:rPr lang="nl-NL" dirty="0"/>
+              <a:t>Persistentie</a:t>
+            </a:r>
           </a:p>
         </p:txBody>
       </p:sp>
@@ -5837,21 +5753,87 @@
             <p:ph idx="1"/>
           </p:nvPr>
         </p:nvSpPr>
-        <p:spPr/>
+        <p:spPr>
+          <a:xfrm>
+            <a:off x="1667435" y="2052116"/>
+            <a:ext cx="8902704" cy="3997828"/>
+          </a:xfrm>
+        </p:spPr>
         <p:txBody>
           <a:bodyPr/>
           <a:lstStyle/>
           <a:p>
-            <a:endParaRPr lang="nl-NL"/>
-          </a:p>
-        </p:txBody>
-      </p:sp>
-      <p:sp>
-        <p:nvSpPr>
-          <p:cNvPr id="5" name="Tekstvak 4">
+            <a:r>
+              <a:rPr lang="nl-NL" dirty="0"/>
+              <a:t>Mijn </a:t>
+            </a:r>
+            <a:r>
+              <a:rPr lang="nl-NL" dirty="0" err="1"/>
+              <a:t>AppDataOpslag</a:t>
+            </a:r>
+            <a:r>
+              <a:rPr lang="nl-NL" dirty="0"/>
+              <a:t> wordt als object opgeslagen in een bestand. De </a:t>
+            </a:r>
+            <a:r>
+              <a:rPr lang="nl-NL" dirty="0" err="1"/>
+              <a:t>snake</a:t>
+            </a:r>
+            <a:r>
+              <a:rPr lang="nl-NL" dirty="0"/>
+              <a:t> metadata en gespeelde games blijven daardoor bewaard. Ik gebruik dit bij </a:t>
+            </a:r>
+          </a:p>
+          <a:p>
+            <a:r>
+              <a:rPr lang="nl-NL" dirty="0"/>
+              <a:t>PATCH /</a:t>
+            </a:r>
+            <a:r>
+              <a:rPr lang="nl-NL" dirty="0" err="1"/>
+              <a:t>snake</a:t>
+            </a:r>
+            <a:r>
+              <a:rPr lang="nl-NL" dirty="0"/>
+              <a:t>, </a:t>
+            </a:r>
+          </a:p>
+          <a:p>
+            <a:r>
+              <a:rPr lang="nl-NL" dirty="0"/>
+              <a:t>start/move/end van </a:t>
+            </a:r>
+            <a:r>
+              <a:rPr lang="nl-NL" dirty="0" err="1"/>
+              <a:t>Battlesnake</a:t>
+            </a:r>
+            <a:r>
+              <a:rPr lang="nl-NL" dirty="0"/>
+              <a:t> en bij DELETE /games/{</a:t>
+            </a:r>
+            <a:r>
+              <a:rPr lang="nl-NL" dirty="0" err="1"/>
+              <a:t>gameId</a:t>
+            </a:r>
+            <a:r>
+              <a:rPr lang="nl-NL" dirty="0"/>
+              <a:t>}. </a:t>
+            </a:r>
+          </a:p>
+          <a:p>
+            <a:r>
+              <a:rPr lang="nl-NL" dirty="0"/>
+              <a:t>Alleen mijn testgebruikers zijn niet persistent opgeslagen.</a:t>
+            </a:r>
+          </a:p>
+        </p:txBody>
+      </p:sp>
+      <p:sp>
+        <p:nvSpPr>
+          <p:cNvPr id="7" name="Tekstvak 6">
             <a:extLst>
               <a:ext uri="{FF2B5EF4-FFF2-40B4-BE49-F238E27FC236}">
-                <a16:creationId xmlns:a16="http://schemas.microsoft.com/office/drawing/2014/main" id="{615BCB6B-DC1E-176F-E8FE-BFCE7383656E}"/>
+                <a16:creationId xmlns:a16="http://schemas.microsoft.com/office/drawing/2014/main" id="{ED357E56-8362-2E6C-1FF4-52B3691A4EC1}"/>
               </a:ext>
             </a:extLst>
           </p:cNvPr>
@@ -5860,8 +5842,8 @@
         </p:nvSpPr>
         <p:spPr>
           <a:xfrm>
-            <a:off x="3049793" y="3247023"/>
-            <a:ext cx="6099586" cy="369332"/>
+            <a:off x="1920239" y="5680612"/>
+            <a:ext cx="6099586" cy="646331"/>
           </a:xfrm>
           <a:prstGeom prst="rect">
             <a:avLst/>
@@ -5875,8 +5857,15 @@
           <a:lstStyle/>
           <a:p>
             <a:r>
-              <a:rPr lang="nl-NL" dirty="0"/>
-              <a:t>Persistentie</a:t>
+              <a:rPr lang="nl-NL" dirty="0" err="1"/>
+              <a:t>SnakeSettings.java</a:t>
+            </a:r>
+            <a:endParaRPr lang="nl-NL" dirty="0"/>
+          </a:p>
+          <a:p>
+            <a:r>
+              <a:rPr lang="nl-NL" dirty="0"/>
+              <a:t>http://localhost:8082/restservices</a:t>
             </a:r>
           </a:p>
         </p:txBody>
@@ -6222,7 +6211,15 @@
             </a:r>
             <a:r>
               <a:rPr lang="nl-NL" dirty="0"/>
-              <a:t> package ontvangt HTTP </a:t>
+              <a:t> package ontvangt HTTP</a:t>
+            </a:r>
+            <a:r>
+              <a:rPr lang="nl-NL" b="1" dirty="0"/>
+              <a:t>S</a:t>
+            </a:r>
+            <a:r>
+              <a:rPr lang="nl-NL" dirty="0"/>
+              <a:t> </a:t>
             </a:r>
             <a:r>
               <a:rPr lang="nl-NL" dirty="0" err="1"/>
@@ -6393,105 +6390,6 @@
 </file>
 
 <file path=ppt/slides/slide6.xml><?xml version="1.0" encoding="utf-8"?>
-<p:sld xmlns:a="http://schemas.openxmlformats.org/drawingml/2006/main" xmlns:r="http://schemas.openxmlformats.org/officeDocument/2006/relationships" xmlns:p="http://schemas.openxmlformats.org/presentationml/2006/main">
-  <p:cSld>
-    <p:spTree>
-      <p:nvGrpSpPr>
-        <p:cNvPr id="1" name=""/>
-        <p:cNvGrpSpPr/>
-        <p:nvPr/>
-      </p:nvGrpSpPr>
-      <p:grpSpPr>
-        <a:xfrm>
-          <a:off x="0" y="0"/>
-          <a:ext cx="0" cy="0"/>
-          <a:chOff x="0" y="0"/>
-          <a:chExt cx="0" cy="0"/>
-        </a:xfrm>
-      </p:grpSpPr>
-      <p:sp>
-        <p:nvSpPr>
-          <p:cNvPr id="2" name="Titel 1">
-            <a:extLst>
-              <a:ext uri="{FF2B5EF4-FFF2-40B4-BE49-F238E27FC236}">
-                <a16:creationId xmlns:a16="http://schemas.microsoft.com/office/drawing/2014/main" id="{1C44AC5A-3A8C-872F-6580-7ED7F88F9BA2}"/>
-              </a:ext>
-            </a:extLst>
-          </p:cNvPr>
-          <p:cNvSpPr>
-            <a:spLocks noGrp="1"/>
-          </p:cNvSpPr>
-          <p:nvPr>
-            <p:ph type="title"/>
-          </p:nvPr>
-        </p:nvSpPr>
-        <p:spPr/>
-        <p:txBody>
-          <a:bodyPr/>
-          <a:lstStyle/>
-          <a:p>
-            <a:pPr algn="ctr"/>
-            <a:r>
-              <a:rPr lang="nl-NL" dirty="0"/>
-              <a:t>Login - Koppeling FEP &amp; BEP</a:t>
-            </a:r>
-          </a:p>
-        </p:txBody>
-      </p:sp>
-      <p:sp>
-        <p:nvSpPr>
-          <p:cNvPr id="3" name="Tijdelijke aanduiding voor inhoud 2">
-            <a:extLst>
-              <a:ext uri="{FF2B5EF4-FFF2-40B4-BE49-F238E27FC236}">
-                <a16:creationId xmlns:a16="http://schemas.microsoft.com/office/drawing/2014/main" id="{F97CED18-4833-EEA6-ADC7-CA3C2AE8A4A9}"/>
-              </a:ext>
-            </a:extLst>
-          </p:cNvPr>
-          <p:cNvSpPr>
-            <a:spLocks noGrp="1"/>
-          </p:cNvSpPr>
-          <p:nvPr>
-            <p:ph idx="1"/>
-          </p:nvPr>
-        </p:nvSpPr>
-        <p:spPr/>
-        <p:txBody>
-          <a:bodyPr/>
-          <a:lstStyle/>
-          <a:p>
-            <a:r>
-              <a:rPr lang="nl-NL" dirty="0" err="1"/>
-              <a:t>ContextListener</a:t>
-            </a:r>
-            <a:endParaRPr lang="nl-NL" dirty="0"/>
-          </a:p>
-          <a:p>
-            <a:r>
-              <a:rPr lang="nl-NL" dirty="0"/>
-              <a:t>JS </a:t>
-            </a:r>
-            <a:r>
-              <a:rPr lang="nl-NL" dirty="0" err="1"/>
-              <a:t>fetch</a:t>
-            </a:r>
-            <a:endParaRPr lang="nl-NL" dirty="0"/>
-          </a:p>
-        </p:txBody>
-      </p:sp>
-    </p:spTree>
-    <p:extLst>
-      <p:ext uri="{BB962C8B-B14F-4D97-AF65-F5344CB8AC3E}">
-        <p14:creationId xmlns:p14="http://schemas.microsoft.com/office/powerpoint/2010/main" val="886102509"/>
-      </p:ext>
-    </p:extLst>
-  </p:cSld>
-  <p:clrMapOvr>
-    <a:masterClrMapping/>
-  </p:clrMapOvr>
-</p:sld>
-</file>
-
-<file path=ppt/slides/slide7.xml><?xml version="1.0" encoding="utf-8"?>
 <p:sld xmlns:a="http://schemas.openxmlformats.org/drawingml/2006/main" xmlns:r="http://schemas.openxmlformats.org/officeDocument/2006/relationships" xmlns:p="http://schemas.openxmlformats.org/presentationml/2006/main">
   <p:cSld>
     <p:spTree>
@@ -7782,6 +7680,397 @@
 </p:sld>
 </file>
 
+<file path=ppt/slides/slide7.xml><?xml version="1.0" encoding="utf-8"?>
+<p:sld xmlns:a="http://schemas.openxmlformats.org/drawingml/2006/main" xmlns:r="http://schemas.openxmlformats.org/officeDocument/2006/relationships" xmlns:p="http://schemas.openxmlformats.org/presentationml/2006/main">
+  <p:cSld>
+    <p:spTree>
+      <p:nvGrpSpPr>
+        <p:cNvPr id="1" name=""/>
+        <p:cNvGrpSpPr/>
+        <p:nvPr/>
+      </p:nvGrpSpPr>
+      <p:grpSpPr>
+        <a:xfrm>
+          <a:off x="0" y="0"/>
+          <a:ext cx="0" cy="0"/>
+          <a:chOff x="0" y="0"/>
+          <a:chExt cx="0" cy="0"/>
+        </a:xfrm>
+      </p:grpSpPr>
+      <p:sp>
+        <p:nvSpPr>
+          <p:cNvPr id="2" name="Titel 1">
+            <a:extLst>
+              <a:ext uri="{FF2B5EF4-FFF2-40B4-BE49-F238E27FC236}">
+                <a16:creationId xmlns:a16="http://schemas.microsoft.com/office/drawing/2014/main" id="{64DFF650-221E-08D4-7AB8-597D5CBD85DB}"/>
+              </a:ext>
+            </a:extLst>
+          </p:cNvPr>
+          <p:cNvSpPr>
+            <a:spLocks noGrp="1"/>
+          </p:cNvSpPr>
+          <p:nvPr>
+            <p:ph type="title"/>
+          </p:nvPr>
+        </p:nvSpPr>
+        <p:spPr/>
+        <p:txBody>
+          <a:bodyPr/>
+          <a:lstStyle/>
+          <a:p>
+            <a:pPr algn="ctr"/>
+            <a:r>
+              <a:rPr lang="nl-NL" dirty="0"/>
+              <a:t>Koppeling FEP &amp; BEP</a:t>
+            </a:r>
+          </a:p>
+        </p:txBody>
+      </p:sp>
+      <p:sp>
+        <p:nvSpPr>
+          <p:cNvPr id="3" name="Tijdelijke aanduiding voor inhoud 2">
+            <a:extLst>
+              <a:ext uri="{FF2B5EF4-FFF2-40B4-BE49-F238E27FC236}">
+                <a16:creationId xmlns:a16="http://schemas.microsoft.com/office/drawing/2014/main" id="{957309D5-B859-E1E5-AECB-9EE0FE7E0D38}"/>
+              </a:ext>
+            </a:extLst>
+          </p:cNvPr>
+          <p:cNvSpPr>
+            <a:spLocks noGrp="1"/>
+          </p:cNvSpPr>
+          <p:nvPr>
+            <p:ph idx="1"/>
+          </p:nvPr>
+        </p:nvSpPr>
+        <p:spPr>
+          <a:xfrm>
+            <a:off x="2493474" y="1602889"/>
+            <a:ext cx="7637929" cy="1703854"/>
+          </a:xfrm>
+        </p:spPr>
+        <p:txBody>
+          <a:bodyPr>
+            <a:normAutofit/>
+          </a:bodyPr>
+          <a:lstStyle/>
+          <a:p>
+            <a:r>
+              <a:rPr lang="nl-NL" sz="1500" dirty="0"/>
+              <a:t>login-</a:t>
+            </a:r>
+            <a:r>
+              <a:rPr lang="nl-NL" sz="1500" dirty="0" err="1"/>
+              <a:t>service.js</a:t>
+            </a:r>
+            <a:r>
+              <a:rPr lang="nl-NL" sz="1500" dirty="0"/>
+              <a:t> → POST /restservices/</a:t>
+            </a:r>
+            <a:r>
+              <a:rPr lang="nl-NL" sz="1500" dirty="0" err="1"/>
+              <a:t>authentication</a:t>
+            </a:r>
+            <a:r>
+              <a:rPr lang="nl-NL" sz="1500" dirty="0"/>
+              <a:t> + JWT opslaan</a:t>
+            </a:r>
+          </a:p>
+          <a:p>
+            <a:r>
+              <a:rPr lang="nl-NL" sz="1500" dirty="0" err="1"/>
+              <a:t>snake-service.js</a:t>
+            </a:r>
+            <a:r>
+              <a:rPr lang="nl-NL" sz="1500" dirty="0"/>
+              <a:t> → GET /restservices/</a:t>
+            </a:r>
+            <a:r>
+              <a:rPr lang="nl-NL" sz="1500" dirty="0" err="1"/>
+              <a:t>snake</a:t>
+            </a:r>
+            <a:r>
+              <a:rPr lang="nl-NL" sz="1500" dirty="0"/>
+              <a:t> + PATCH /restservices/</a:t>
+            </a:r>
+            <a:r>
+              <a:rPr lang="nl-NL" sz="1500" dirty="0" err="1"/>
+              <a:t>snake</a:t>
+            </a:r>
+            <a:r>
+              <a:rPr lang="nl-NL" sz="1500" dirty="0"/>
+              <a:t> met JWT</a:t>
+            </a:r>
+          </a:p>
+          <a:p>
+            <a:r>
+              <a:rPr lang="nl-NL" sz="1500" dirty="0"/>
+              <a:t>games-</a:t>
+            </a:r>
+            <a:r>
+              <a:rPr lang="nl-NL" sz="1500" dirty="0" err="1"/>
+              <a:t>service.js</a:t>
+            </a:r>
+            <a:r>
+              <a:rPr lang="nl-NL" sz="1500" dirty="0"/>
+              <a:t> → GET /restservices/games + GET/DELETE /restservices/games/{</a:t>
+            </a:r>
+            <a:r>
+              <a:rPr lang="nl-NL" sz="1500" dirty="0" err="1"/>
+              <a:t>gameId</a:t>
+            </a:r>
+            <a:r>
+              <a:rPr lang="nl-NL" sz="1500" dirty="0"/>
+              <a:t>} met JWT</a:t>
+            </a:r>
+          </a:p>
+        </p:txBody>
+      </p:sp>
+      <p:sp>
+        <p:nvSpPr>
+          <p:cNvPr id="5" name="Tekstvak 4">
+            <a:extLst>
+              <a:ext uri="{FF2B5EF4-FFF2-40B4-BE49-F238E27FC236}">
+                <a16:creationId xmlns:a16="http://schemas.microsoft.com/office/drawing/2014/main" id="{303A52F5-9753-86B7-475E-550B62A87605}"/>
+              </a:ext>
+            </a:extLst>
+          </p:cNvPr>
+          <p:cNvSpPr txBox="1"/>
+          <p:nvPr/>
+        </p:nvSpPr>
+        <p:spPr>
+          <a:xfrm>
+            <a:off x="1160481" y="3469341"/>
+            <a:ext cx="10150738" cy="3323987"/>
+          </a:xfrm>
+          <a:prstGeom prst="rect">
+            <a:avLst/>
+          </a:prstGeom>
+          <a:noFill/>
+        </p:spPr>
+        <p:txBody>
+          <a:bodyPr wrap="square">
+            <a:spAutoFit/>
+          </a:bodyPr>
+          <a:lstStyle/>
+          <a:p>
+            <a:r>
+              <a:rPr lang="nl-NL" sz="1500" dirty="0"/>
+              <a:t>Voor de koppeling tussen mijn </a:t>
+            </a:r>
+            <a:r>
+              <a:rPr lang="nl-NL" sz="1500" dirty="0" err="1"/>
+              <a:t>frontend</a:t>
+            </a:r>
+            <a:r>
+              <a:rPr lang="nl-NL" sz="1500" dirty="0"/>
+              <a:t> en backend gebruik ik aparte </a:t>
+            </a:r>
+            <a:r>
+              <a:rPr lang="nl-NL" sz="1500" dirty="0" err="1"/>
+              <a:t>JavaScript</a:t>
+            </a:r>
+            <a:r>
+              <a:rPr lang="nl-NL" sz="1500" dirty="0"/>
+              <a:t> service classes. Dit was al deels voorgekauwd door de template van de docenten. De </a:t>
+            </a:r>
+            <a:r>
+              <a:rPr lang="nl-NL" sz="1500" dirty="0" err="1"/>
+              <a:t>frontend</a:t>
+            </a:r>
+            <a:r>
+              <a:rPr lang="nl-NL" sz="1500" dirty="0"/>
+              <a:t> roept de REST </a:t>
+            </a:r>
+            <a:r>
+              <a:rPr lang="nl-NL" sz="1500" dirty="0" err="1"/>
+              <a:t>endpoints</a:t>
+            </a:r>
+            <a:r>
+              <a:rPr lang="nl-NL" sz="1500" dirty="0"/>
+              <a:t> niet direct overal aan, maar doet dit via login-</a:t>
+            </a:r>
+            <a:r>
+              <a:rPr lang="nl-NL" sz="1500" dirty="0" err="1"/>
+              <a:t>service.js</a:t>
+            </a:r>
+            <a:r>
+              <a:rPr lang="nl-NL" sz="1500" dirty="0"/>
+              <a:t>, </a:t>
+            </a:r>
+            <a:r>
+              <a:rPr lang="nl-NL" sz="1500" dirty="0" err="1"/>
+              <a:t>snake-service.js</a:t>
+            </a:r>
+            <a:r>
+              <a:rPr lang="nl-NL" sz="1500" dirty="0"/>
+              <a:t> en games-</a:t>
+            </a:r>
+            <a:r>
+              <a:rPr lang="nl-NL" sz="1500" dirty="0" err="1"/>
+              <a:t>service.js</a:t>
+            </a:r>
+            <a:r>
+              <a:rPr lang="nl-NL" sz="1500" dirty="0"/>
+              <a:t>.</a:t>
+            </a:r>
+            <a:br>
+              <a:rPr lang="nl-NL" sz="1500" dirty="0"/>
+            </a:br>
+            <a:br>
+              <a:rPr lang="nl-NL" sz="1500" dirty="0"/>
+            </a:br>
+            <a:r>
+              <a:rPr lang="nl-NL" sz="1500" dirty="0"/>
+              <a:t>login-</a:t>
+            </a:r>
+            <a:r>
+              <a:rPr lang="nl-NL" sz="1500" dirty="0" err="1"/>
+              <a:t>service.js</a:t>
+            </a:r>
+            <a:r>
+              <a:rPr lang="nl-NL" sz="1500" dirty="0"/>
+              <a:t> handelt het inloggen af via POST /restservices/</a:t>
+            </a:r>
+            <a:r>
+              <a:rPr lang="nl-NL" sz="1500" dirty="0" err="1"/>
+              <a:t>authentication</a:t>
+            </a:r>
+            <a:r>
+              <a:rPr lang="nl-NL" sz="1500" dirty="0"/>
+              <a:t> en bewaart de JWT in </a:t>
+            </a:r>
+            <a:r>
+              <a:rPr lang="nl-NL" sz="1500" dirty="0" err="1"/>
+              <a:t>sessionStorage</a:t>
+            </a:r>
+            <a:r>
+              <a:rPr lang="nl-NL" sz="1500" dirty="0"/>
+              <a:t>.</a:t>
+            </a:r>
+          </a:p>
+          <a:p>
+            <a:r>
+              <a:rPr lang="nl-NL" sz="1500" dirty="0"/>
+              <a:t> </a:t>
+            </a:r>
+            <a:br>
+              <a:rPr lang="nl-NL" sz="1500" dirty="0"/>
+            </a:br>
+            <a:r>
+              <a:rPr lang="nl-NL" sz="1500" dirty="0" err="1"/>
+              <a:t>snake-service.js</a:t>
+            </a:r>
+            <a:r>
+              <a:rPr lang="nl-NL" sz="1500" dirty="0"/>
+              <a:t> haalt de </a:t>
+            </a:r>
+            <a:r>
+              <a:rPr lang="nl-NL" sz="1500" dirty="0" err="1"/>
+              <a:t>snake</a:t>
+            </a:r>
+            <a:r>
+              <a:rPr lang="nl-NL" sz="1500" dirty="0"/>
+              <a:t> metadata op via GET /restservices/</a:t>
+            </a:r>
+            <a:r>
+              <a:rPr lang="nl-NL" sz="1500" dirty="0" err="1"/>
+              <a:t>snake</a:t>
+            </a:r>
+            <a:r>
+              <a:rPr lang="nl-NL" sz="1500" dirty="0"/>
+              <a:t> en past de metadata aan via PATCH /restservices/</a:t>
+            </a:r>
+            <a:r>
+              <a:rPr lang="nl-NL" sz="1500" dirty="0" err="1"/>
+              <a:t>snake</a:t>
+            </a:r>
+            <a:r>
+              <a:rPr lang="nl-NL" sz="1500" dirty="0"/>
+              <a:t> met een </a:t>
+            </a:r>
+            <a:r>
+              <a:rPr lang="nl-NL" sz="1500" dirty="0" err="1"/>
+              <a:t>Authorization</a:t>
+            </a:r>
+            <a:r>
+              <a:rPr lang="nl-NL" sz="1500" dirty="0"/>
+              <a:t> </a:t>
+            </a:r>
+            <a:r>
+              <a:rPr lang="nl-NL" sz="1500" dirty="0" err="1"/>
+              <a:t>Bearer</a:t>
+            </a:r>
+            <a:r>
+              <a:rPr lang="nl-NL" sz="1500" dirty="0"/>
+              <a:t> token.</a:t>
+            </a:r>
+          </a:p>
+          <a:p>
+            <a:br>
+              <a:rPr lang="nl-NL" sz="1500" dirty="0"/>
+            </a:br>
+            <a:r>
+              <a:rPr lang="nl-NL" sz="1500" dirty="0"/>
+              <a:t>games-</a:t>
+            </a:r>
+            <a:r>
+              <a:rPr lang="nl-NL" sz="1500" dirty="0" err="1"/>
+              <a:t>service.js</a:t>
+            </a:r>
+            <a:r>
+              <a:rPr lang="nl-NL" sz="1500" dirty="0"/>
+              <a:t> haalt gespeelde games op via GET /restservices/games, toont details via GET /restservices/games/{</a:t>
+            </a:r>
+            <a:r>
+              <a:rPr lang="nl-NL" sz="1500" dirty="0" err="1"/>
+              <a:t>gameId</a:t>
+            </a:r>
+            <a:r>
+              <a:rPr lang="nl-NL" sz="1500" dirty="0"/>
+              <a:t>} en verwijdert games via DELETE /restservices/games/{</a:t>
+            </a:r>
+            <a:r>
+              <a:rPr lang="nl-NL" sz="1500" dirty="0" err="1"/>
+              <a:t>gameId</a:t>
+            </a:r>
+            <a:r>
+              <a:rPr lang="nl-NL" sz="1500" dirty="0"/>
+              <a:t>}.</a:t>
+            </a:r>
+            <a:br>
+              <a:rPr lang="nl-NL" sz="1500" dirty="0"/>
+            </a:br>
+            <a:br>
+              <a:rPr lang="nl-NL" sz="1500" dirty="0"/>
+            </a:br>
+            <a:r>
+              <a:rPr lang="nl-NL" sz="1500" dirty="0"/>
+              <a:t>Hiermee is de FEP-BEP koppeling gescheiden in service classes en gebruikt de </a:t>
+            </a:r>
+            <a:r>
+              <a:rPr lang="nl-NL" sz="1500" dirty="0" err="1"/>
+              <a:t>frontend</a:t>
+            </a:r>
+            <a:r>
+              <a:rPr lang="nl-NL" sz="1500" dirty="0"/>
+              <a:t> de REST API van backend op een manier waarmee ik het kan hergebruiken.</a:t>
+            </a:r>
+          </a:p>
+        </p:txBody>
+      </p:sp>
+    </p:spTree>
+    <p:extLst>
+      <p:ext uri="{BB962C8B-B14F-4D97-AF65-F5344CB8AC3E}">
+        <p14:creationId xmlns:p14="http://schemas.microsoft.com/office/powerpoint/2010/main" val="2692118703"/>
+      </p:ext>
+    </p:extLst>
+  </p:cSld>
+  <p:clrMapOvr>
+    <a:masterClrMapping/>
+  </p:clrMapOvr>
+</p:sld>
+</file>
+
 <file path=ppt/slides/slide8.xml><?xml version="1.0" encoding="utf-8"?>
 <p:sld xmlns:a="http://schemas.openxmlformats.org/drawingml/2006/main" xmlns:r="http://schemas.openxmlformats.org/officeDocument/2006/relationships" xmlns:p="http://schemas.openxmlformats.org/presentationml/2006/main">
   <p:cSld>
@@ -7804,7 +8093,7 @@
           <p:cNvPr id="2" name="Titel 1">
             <a:extLst>
               <a:ext uri="{FF2B5EF4-FFF2-40B4-BE49-F238E27FC236}">
-                <a16:creationId xmlns:a16="http://schemas.microsoft.com/office/drawing/2014/main" id="{64DFF650-221E-08D4-7AB8-597D5CBD85DB}"/>
+                <a16:creationId xmlns:a16="http://schemas.microsoft.com/office/drawing/2014/main" id="{6AC00B7E-C366-0A99-91AE-E79620648498}"/>
               </a:ext>
             </a:extLst>
           </p:cNvPr>
@@ -7823,7 +8112,7 @@
             <a:pPr algn="ctr"/>
             <a:r>
               <a:rPr lang="nl-NL" dirty="0"/>
-              <a:t>Koppeling FEP &amp; BEP</a:t>
+              <a:t>Uiterlijk slang aanpassen</a:t>
             </a:r>
           </a:p>
         </p:txBody>
@@ -7833,7 +8122,7 @@
           <p:cNvPr id="3" name="Tijdelijke aanduiding voor inhoud 2">
             <a:extLst>
               <a:ext uri="{FF2B5EF4-FFF2-40B4-BE49-F238E27FC236}">
-                <a16:creationId xmlns:a16="http://schemas.microsoft.com/office/drawing/2014/main" id="{957309D5-B859-E1E5-AECB-9EE0FE7E0D38}"/>
+                <a16:creationId xmlns:a16="http://schemas.microsoft.com/office/drawing/2014/main" id="{560BAE20-B5AC-282B-C173-3FBB01B9C0D4}"/>
               </a:ext>
             </a:extLst>
           </p:cNvPr>
@@ -7844,326 +8133,60 @@
             <p:ph idx="1"/>
           </p:nvPr>
         </p:nvSpPr>
-        <p:spPr>
-          <a:xfrm>
-            <a:off x="2493474" y="1602889"/>
-            <a:ext cx="7637929" cy="1703854"/>
-          </a:xfrm>
-        </p:spPr>
-        <p:txBody>
-          <a:bodyPr>
-            <a:normAutofit/>
-          </a:bodyPr>
-          <a:lstStyle/>
-          <a:p>
-            <a:r>
-              <a:rPr lang="nl-NL" sz="1500" dirty="0"/>
-              <a:t>login-</a:t>
-            </a:r>
-            <a:r>
-              <a:rPr lang="nl-NL" sz="1500" dirty="0" err="1"/>
-              <a:t>service.js</a:t>
-            </a:r>
-            <a:r>
-              <a:rPr lang="nl-NL" sz="1500" dirty="0"/>
-              <a:t> → POST /restservices/</a:t>
-            </a:r>
-            <a:r>
-              <a:rPr lang="nl-NL" sz="1500" dirty="0" err="1"/>
-              <a:t>authentication</a:t>
-            </a:r>
-            <a:r>
-              <a:rPr lang="nl-NL" sz="1500" dirty="0"/>
-              <a:t> + JWT opslaan</a:t>
-            </a:r>
-          </a:p>
-          <a:p>
-            <a:r>
-              <a:rPr lang="nl-NL" sz="1500" dirty="0" err="1"/>
-              <a:t>snake-service.js</a:t>
-            </a:r>
-            <a:r>
-              <a:rPr lang="nl-NL" sz="1500" dirty="0"/>
-              <a:t> → GET /restservices/</a:t>
-            </a:r>
-            <a:r>
-              <a:rPr lang="nl-NL" sz="1500" dirty="0" err="1"/>
-              <a:t>snake</a:t>
-            </a:r>
-            <a:r>
-              <a:rPr lang="nl-NL" sz="1500" dirty="0"/>
-              <a:t> + PATCH /restservices/</a:t>
-            </a:r>
-            <a:r>
-              <a:rPr lang="nl-NL" sz="1500" dirty="0" err="1"/>
-              <a:t>snake</a:t>
-            </a:r>
-            <a:r>
-              <a:rPr lang="nl-NL" sz="1500" dirty="0"/>
-              <a:t> met JWT</a:t>
-            </a:r>
-          </a:p>
-          <a:p>
-            <a:r>
-              <a:rPr lang="nl-NL" sz="1500" dirty="0"/>
-              <a:t>games-</a:t>
-            </a:r>
-            <a:r>
-              <a:rPr lang="nl-NL" sz="1500" dirty="0" err="1"/>
-              <a:t>service.js</a:t>
-            </a:r>
-            <a:r>
-              <a:rPr lang="nl-NL" sz="1500" dirty="0"/>
-              <a:t> → GET /restservices/games + GET/DELETE /restservices/games/{</a:t>
-            </a:r>
-            <a:r>
-              <a:rPr lang="nl-NL" sz="1500" dirty="0" err="1"/>
-              <a:t>gameId</a:t>
-            </a:r>
-            <a:r>
-              <a:rPr lang="nl-NL" sz="1500" dirty="0"/>
-              <a:t>} met JWT</a:t>
-            </a:r>
-          </a:p>
-        </p:txBody>
-      </p:sp>
-      <p:sp>
-        <p:nvSpPr>
-          <p:cNvPr id="5" name="Tekstvak 4">
-            <a:extLst>
-              <a:ext uri="{FF2B5EF4-FFF2-40B4-BE49-F238E27FC236}">
-                <a16:creationId xmlns:a16="http://schemas.microsoft.com/office/drawing/2014/main" id="{303A52F5-9753-86B7-475E-550B62A87605}"/>
-              </a:ext>
-            </a:extLst>
-          </p:cNvPr>
-          <p:cNvSpPr txBox="1"/>
-          <p:nvPr/>
-        </p:nvSpPr>
-        <p:spPr>
-          <a:xfrm>
-            <a:off x="1160481" y="3469341"/>
-            <a:ext cx="10150738" cy="3323987"/>
-          </a:xfrm>
-          <a:prstGeom prst="rect">
-            <a:avLst/>
-          </a:prstGeom>
-          <a:noFill/>
-        </p:spPr>
-        <p:txBody>
-          <a:bodyPr wrap="square">
-            <a:spAutoFit/>
-          </a:bodyPr>
-          <a:lstStyle/>
-          <a:p>
-            <a:r>
-              <a:rPr lang="nl-NL" sz="1500" dirty="0"/>
-              <a:t>Voor de koppeling tussen mijn </a:t>
-            </a:r>
-            <a:r>
-              <a:rPr lang="nl-NL" sz="1500" dirty="0" err="1"/>
-              <a:t>frontend</a:t>
-            </a:r>
-            <a:r>
-              <a:rPr lang="nl-NL" sz="1500" dirty="0"/>
-              <a:t> en backend gebruik ik aparte </a:t>
-            </a:r>
-            <a:r>
-              <a:rPr lang="nl-NL" sz="1500" dirty="0" err="1"/>
-              <a:t>JavaScript</a:t>
-            </a:r>
-            <a:r>
-              <a:rPr lang="nl-NL" sz="1500" dirty="0"/>
-              <a:t> service classes. Dit was al deels voorgekauwd door de template van de docenten. De </a:t>
-            </a:r>
-            <a:r>
-              <a:rPr lang="nl-NL" sz="1500" dirty="0" err="1"/>
-              <a:t>frontend</a:t>
-            </a:r>
-            <a:r>
-              <a:rPr lang="nl-NL" sz="1500" dirty="0"/>
-              <a:t> roept de REST </a:t>
-            </a:r>
-            <a:r>
-              <a:rPr lang="nl-NL" sz="1500" dirty="0" err="1"/>
-              <a:t>endpoints</a:t>
-            </a:r>
-            <a:r>
-              <a:rPr lang="nl-NL" sz="1500" dirty="0"/>
-              <a:t> niet direct overal aan, maar doet dit via login-</a:t>
-            </a:r>
-            <a:r>
-              <a:rPr lang="nl-NL" sz="1500" dirty="0" err="1"/>
-              <a:t>service.js</a:t>
-            </a:r>
-            <a:r>
-              <a:rPr lang="nl-NL" sz="1500" dirty="0"/>
-              <a:t>, </a:t>
-            </a:r>
-            <a:r>
-              <a:rPr lang="nl-NL" sz="1500" dirty="0" err="1"/>
-              <a:t>snake-service.js</a:t>
-            </a:r>
-            <a:r>
-              <a:rPr lang="nl-NL" sz="1500" dirty="0"/>
-              <a:t> en games-</a:t>
-            </a:r>
-            <a:r>
-              <a:rPr lang="nl-NL" sz="1500" dirty="0" err="1"/>
-              <a:t>service.js</a:t>
-            </a:r>
-            <a:r>
-              <a:rPr lang="nl-NL" sz="1500" dirty="0"/>
-              <a:t>.</a:t>
-            </a:r>
-            <a:br>
-              <a:rPr lang="nl-NL" sz="1500" dirty="0"/>
-            </a:br>
-            <a:br>
-              <a:rPr lang="nl-NL" sz="1500" dirty="0"/>
-            </a:br>
-            <a:r>
-              <a:rPr lang="nl-NL" sz="1500" dirty="0"/>
-              <a:t>login-</a:t>
-            </a:r>
-            <a:r>
-              <a:rPr lang="nl-NL" sz="1500" dirty="0" err="1"/>
-              <a:t>service.js</a:t>
-            </a:r>
-            <a:r>
-              <a:rPr lang="nl-NL" sz="1500" dirty="0"/>
-              <a:t> handelt het inloggen af via POST /restservices/</a:t>
-            </a:r>
-            <a:r>
-              <a:rPr lang="nl-NL" sz="1500" dirty="0" err="1"/>
-              <a:t>authentication</a:t>
-            </a:r>
-            <a:r>
-              <a:rPr lang="nl-NL" sz="1500" dirty="0"/>
-              <a:t> en bewaart de JWT in </a:t>
-            </a:r>
-            <a:r>
-              <a:rPr lang="nl-NL" sz="1500" dirty="0" err="1"/>
-              <a:t>sessionStorage</a:t>
-            </a:r>
-            <a:r>
-              <a:rPr lang="nl-NL" sz="1500" dirty="0"/>
-              <a:t>.</a:t>
-            </a:r>
-          </a:p>
-          <a:p>
-            <a:r>
-              <a:rPr lang="nl-NL" sz="1500" dirty="0"/>
+        <p:spPr/>
+        <p:txBody>
+          <a:bodyPr/>
+          <a:lstStyle/>
+          <a:p>
+            <a:r>
+              <a:rPr lang="nl-NL" dirty="0"/>
+              <a:t>Bruno login </a:t>
+            </a:r>
+            <a:r>
+              <a:rPr lang="nl-NL" dirty="0" err="1"/>
+              <a:t>Render</a:t>
+            </a:r>
+            <a:endParaRPr lang="nl-NL" dirty="0"/>
+          </a:p>
+          <a:p>
+            <a:r>
+              <a:rPr lang="nl-NL" dirty="0"/>
+              <a:t>Probeer Patch zonder JWT</a:t>
+            </a:r>
+          </a:p>
+          <a:p>
+            <a:r>
+              <a:rPr lang="nl-NL" dirty="0"/>
+              <a:t>JWT copy</a:t>
+            </a:r>
+          </a:p>
+          <a:p>
+            <a:r>
+              <a:rPr lang="nl-NL" dirty="0"/>
+              <a:t>JWT -&gt; PATCH slang</a:t>
+            </a:r>
+          </a:p>
+          <a:p>
+            <a:r>
+              <a:rPr lang="nl-NL" dirty="0" err="1"/>
+              <a:t>Refresh</a:t>
+            </a:r>
+            <a:r>
+              <a:rPr lang="nl-NL" dirty="0"/>
               <a:t> </a:t>
             </a:r>
-            <a:br>
-              <a:rPr lang="nl-NL" sz="1500" dirty="0"/>
-            </a:br>
-            <a:r>
-              <a:rPr lang="nl-NL" sz="1500" dirty="0" err="1"/>
-              <a:t>snake-service.js</a:t>
-            </a:r>
-            <a:r>
-              <a:rPr lang="nl-NL" sz="1500" dirty="0"/>
-              <a:t> haalt de </a:t>
-            </a:r>
-            <a:r>
-              <a:rPr lang="nl-NL" sz="1500" dirty="0" err="1"/>
-              <a:t>snake</a:t>
-            </a:r>
-            <a:r>
-              <a:rPr lang="nl-NL" sz="1500" dirty="0"/>
-              <a:t> metadata op via GET /restservices/</a:t>
-            </a:r>
-            <a:r>
-              <a:rPr lang="nl-NL" sz="1500" dirty="0" err="1"/>
-              <a:t>snake</a:t>
-            </a:r>
-            <a:r>
-              <a:rPr lang="nl-NL" sz="1500" dirty="0"/>
-              <a:t> en past de metadata aan via PATCH /restservices/</a:t>
-            </a:r>
-            <a:r>
-              <a:rPr lang="nl-NL" sz="1500" dirty="0" err="1"/>
-              <a:t>snake</a:t>
-            </a:r>
-            <a:r>
-              <a:rPr lang="nl-NL" sz="1500" dirty="0"/>
-              <a:t> met een </a:t>
-            </a:r>
-            <a:r>
-              <a:rPr lang="nl-NL" sz="1500" dirty="0" err="1"/>
-              <a:t>Authorization</a:t>
-            </a:r>
-            <a:r>
-              <a:rPr lang="nl-NL" sz="1500" dirty="0"/>
-              <a:t> </a:t>
-            </a:r>
-            <a:r>
-              <a:rPr lang="nl-NL" sz="1500" dirty="0" err="1"/>
-              <a:t>Bearer</a:t>
-            </a:r>
-            <a:r>
-              <a:rPr lang="nl-NL" sz="1500" dirty="0"/>
-              <a:t> token.</a:t>
-            </a:r>
-          </a:p>
-          <a:p>
-            <a:br>
-              <a:rPr lang="nl-NL" sz="1500" dirty="0"/>
-            </a:br>
-            <a:r>
-              <a:rPr lang="nl-NL" sz="1500" dirty="0"/>
-              <a:t>games-</a:t>
-            </a:r>
-            <a:r>
-              <a:rPr lang="nl-NL" sz="1500" dirty="0" err="1"/>
-              <a:t>service.js</a:t>
-            </a:r>
-            <a:r>
-              <a:rPr lang="nl-NL" sz="1500" dirty="0"/>
-              <a:t> haalt gespeelde games op via GET /restservices/games, toont details via GET /restservices/games/{</a:t>
-            </a:r>
-            <a:r>
-              <a:rPr lang="nl-NL" sz="1500" dirty="0" err="1"/>
-              <a:t>gameId</a:t>
-            </a:r>
-            <a:r>
-              <a:rPr lang="nl-NL" sz="1500" dirty="0"/>
-              <a:t>} en verwijdert games via DELETE /restservices/games/{</a:t>
-            </a:r>
-            <a:r>
-              <a:rPr lang="nl-NL" sz="1500" dirty="0" err="1"/>
-              <a:t>gameId</a:t>
-            </a:r>
-            <a:r>
-              <a:rPr lang="nl-NL" sz="1500" dirty="0"/>
-              <a:t>}.</a:t>
-            </a:r>
-            <a:br>
-              <a:rPr lang="nl-NL" sz="1500" dirty="0"/>
-            </a:br>
-            <a:br>
-              <a:rPr lang="nl-NL" sz="1500" dirty="0"/>
-            </a:br>
-            <a:r>
-              <a:rPr lang="nl-NL" sz="1500" dirty="0"/>
-              <a:t>Hiermee is de FEP-BEP koppeling gescheiden in service classes en gebruikt de </a:t>
-            </a:r>
-            <a:r>
-              <a:rPr lang="nl-NL" sz="1500" dirty="0" err="1"/>
-              <a:t>frontend</a:t>
-            </a:r>
-            <a:r>
-              <a:rPr lang="nl-NL" sz="1500" dirty="0"/>
-              <a:t> de REST API van backend op een manier waarmee ik het kan hergebruiken.</a:t>
-            </a:r>
+            <a:r>
+              <a:rPr lang="nl-NL" dirty="0" err="1"/>
+              <a:t>Render</a:t>
+            </a:r>
+            <a:endParaRPr lang="nl-NL" dirty="0"/>
           </a:p>
         </p:txBody>
       </p:sp>
     </p:spTree>
     <p:extLst>
       <p:ext uri="{BB962C8B-B14F-4D97-AF65-F5344CB8AC3E}">
-        <p14:creationId xmlns:p14="http://schemas.microsoft.com/office/powerpoint/2010/main" val="2692118703"/>
+        <p14:creationId xmlns:p14="http://schemas.microsoft.com/office/powerpoint/2010/main" val="3563820616"/>
       </p:ext>
     </p:extLst>
   </p:cSld>
@@ -8195,7 +8218,7 @@
           <p:cNvPr id="2" name="Titel 1">
             <a:extLst>
               <a:ext uri="{FF2B5EF4-FFF2-40B4-BE49-F238E27FC236}">
-                <a16:creationId xmlns:a16="http://schemas.microsoft.com/office/drawing/2014/main" id="{6AC00B7E-C366-0A99-91AE-E79620648498}"/>
+                <a16:creationId xmlns:a16="http://schemas.microsoft.com/office/drawing/2014/main" id="{5175050D-495A-F2EF-C8F3-43322658716F}"/>
               </a:ext>
             </a:extLst>
           </p:cNvPr>
@@ -8214,7 +8237,7 @@
             <a:pPr algn="ctr"/>
             <a:r>
               <a:rPr lang="nl-NL" dirty="0"/>
-              <a:t>Uiterlijk slang aanpassen</a:t>
+              <a:t>Informatie van gespeelde potjes</a:t>
             </a:r>
           </a:p>
         </p:txBody>
@@ -8224,7 +8247,7 @@
           <p:cNvPr id="3" name="Tijdelijke aanduiding voor inhoud 2">
             <a:extLst>
               <a:ext uri="{FF2B5EF4-FFF2-40B4-BE49-F238E27FC236}">
-                <a16:creationId xmlns:a16="http://schemas.microsoft.com/office/drawing/2014/main" id="{560BAE20-B5AC-282B-C173-3FBB01B9C0D4}"/>
+                <a16:creationId xmlns:a16="http://schemas.microsoft.com/office/drawing/2014/main" id="{899D5CE8-F47D-B31B-020F-E8A889A578F4}"/>
               </a:ext>
             </a:extLst>
           </p:cNvPr>
@@ -8242,53 +8265,41 @@
           <a:p>
             <a:r>
               <a:rPr lang="nl-NL" dirty="0"/>
-              <a:t>Bruno login </a:t>
-            </a:r>
-            <a:r>
-              <a:rPr lang="nl-NL" dirty="0" err="1"/>
-              <a:t>Render</a:t>
+              <a:t>Online: </a:t>
+            </a:r>
+            <a:r>
+              <a:rPr lang="nl-NL" dirty="0">
+                <a:hlinkClick r:id="rId2"/>
+              </a:rPr>
+              <a:t>https://battlesnake-nm77.onrender.com/games/games.html</a:t>
             </a:r>
             <a:endParaRPr lang="nl-NL" dirty="0"/>
           </a:p>
           <a:p>
-            <a:r>
-              <a:rPr lang="nl-NL" dirty="0"/>
-              <a:t>Probeer Patch zonder JWT</a:t>
-            </a:r>
-          </a:p>
-          <a:p>
-            <a:r>
-              <a:rPr lang="nl-NL" dirty="0"/>
-              <a:t>JWT copy</a:t>
-            </a:r>
-          </a:p>
-          <a:p>
-            <a:r>
-              <a:rPr lang="nl-NL" dirty="0"/>
-              <a:t>JWT -&gt; PATCH slang</a:t>
-            </a:r>
-          </a:p>
-          <a:p>
-            <a:r>
-              <a:rPr lang="nl-NL" dirty="0" err="1"/>
-              <a:t>Refresh</a:t>
+            <a:endParaRPr lang="nl-NL" dirty="0"/>
+          </a:p>
+          <a:p>
+            <a:r>
+              <a:rPr lang="nl-NL" dirty="0"/>
+              <a:t>Lokaal: </a:t>
+            </a:r>
+            <a:r>
+              <a:rPr lang="nl-NL" dirty="0">
+                <a:hlinkClick r:id="rId3"/>
+              </a:rPr>
+              <a:t>http://localhost:8082/games/games.html</a:t>
             </a:r>
             <a:r>
               <a:rPr lang="nl-NL" dirty="0"/>
               <a:t> </a:t>
             </a:r>
-            <a:r>
-              <a:rPr lang="nl-NL" dirty="0" err="1"/>
-              <a:t>Render</a:t>
-            </a:r>
-            <a:endParaRPr lang="nl-NL" dirty="0"/>
           </a:p>
         </p:txBody>
       </p:sp>
     </p:spTree>
     <p:extLst>
       <p:ext uri="{BB962C8B-B14F-4D97-AF65-F5344CB8AC3E}">
-        <p14:creationId xmlns:p14="http://schemas.microsoft.com/office/powerpoint/2010/main" val="3563820616"/>
+        <p14:creationId xmlns:p14="http://schemas.microsoft.com/office/powerpoint/2010/main" val="1915665410"/>
       </p:ext>
     </p:extLst>
   </p:cSld>
